--- a/pcds clean.pptx
+++ b/pcds clean.pptx
@@ -5,7 +5,15 @@
     <p:sldMasterId id="2147483648" r:id="rId1"/>
   </p:sldMasterIdLst>
   <p:sldIdLst>
-    <p:sldId id="256" r:id="rId2"/>
+    <p:sldId id="257" r:id="rId2"/>
+    <p:sldId id="258" r:id="rId3"/>
+    <p:sldId id="259" r:id="rId4"/>
+    <p:sldId id="260" r:id="rId5"/>
+    <p:sldId id="261" r:id="rId6"/>
+    <p:sldId id="262" r:id="rId7"/>
+    <p:sldId id="264" r:id="rId8"/>
+    <p:sldId id="265" r:id="rId9"/>
+    <p:sldId id="256" r:id="rId10"/>
   </p:sldIdLst>
   <p:sldSz cx="12192000" cy="6858000"/>
   <p:notesSz cx="6858000" cy="9144000"/>
@@ -104,6 +112,11 @@
       </a:defRPr>
     </a:lvl9pPr>
   </p:defaultTextStyle>
+  <p:extLst>
+    <p:ext uri="{EFAFB233-063F-42B5-8137-9DF3F51BA10A}">
+      <p15:sldGuideLst xmlns:p15="http://schemas.microsoft.com/office/powerpoint/2012/main"/>
+    </p:ext>
+  </p:extLst>
 </p:presentation>
 </file>
 
@@ -254,7 +267,7 @@
           <a:p>
             <a:fld id="{7F5A2A1A-B723-AA49-8B88-75E105055E6B}" type="datetimeFigureOut">
               <a:rPr lang="en-US" smtClean="0"/>
-              <a:t>2/18/26</a:t>
+              <a:t>2/23/26</a:t>
             </a:fld>
             <a:endParaRPr lang="en-US"/>
           </a:p>
@@ -452,7 +465,7 @@
           <a:p>
             <a:fld id="{7F5A2A1A-B723-AA49-8B88-75E105055E6B}" type="datetimeFigureOut">
               <a:rPr lang="en-US" smtClean="0"/>
-              <a:t>2/18/26</a:t>
+              <a:t>2/23/26</a:t>
             </a:fld>
             <a:endParaRPr lang="en-US"/>
           </a:p>
@@ -660,7 +673,7 @@
           <a:p>
             <a:fld id="{7F5A2A1A-B723-AA49-8B88-75E105055E6B}" type="datetimeFigureOut">
               <a:rPr lang="en-US" smtClean="0"/>
-              <a:t>2/18/26</a:t>
+              <a:t>2/23/26</a:t>
             </a:fld>
             <a:endParaRPr lang="en-US"/>
           </a:p>
@@ -858,7 +871,7 @@
           <a:p>
             <a:fld id="{7F5A2A1A-B723-AA49-8B88-75E105055E6B}" type="datetimeFigureOut">
               <a:rPr lang="en-US" smtClean="0"/>
-              <a:t>2/18/26</a:t>
+              <a:t>2/23/26</a:t>
             </a:fld>
             <a:endParaRPr lang="en-US"/>
           </a:p>
@@ -1133,7 +1146,7 @@
           <a:p>
             <a:fld id="{7F5A2A1A-B723-AA49-8B88-75E105055E6B}" type="datetimeFigureOut">
               <a:rPr lang="en-US" smtClean="0"/>
-              <a:t>2/18/26</a:t>
+              <a:t>2/23/26</a:t>
             </a:fld>
             <a:endParaRPr lang="en-US"/>
           </a:p>
@@ -1398,7 +1411,7 @@
           <a:p>
             <a:fld id="{7F5A2A1A-B723-AA49-8B88-75E105055E6B}" type="datetimeFigureOut">
               <a:rPr lang="en-US" smtClean="0"/>
-              <a:t>2/18/26</a:t>
+              <a:t>2/23/26</a:t>
             </a:fld>
             <a:endParaRPr lang="en-US"/>
           </a:p>
@@ -1810,7 +1823,7 @@
           <a:p>
             <a:fld id="{7F5A2A1A-B723-AA49-8B88-75E105055E6B}" type="datetimeFigureOut">
               <a:rPr lang="en-US" smtClean="0"/>
-              <a:t>2/18/26</a:t>
+              <a:t>2/23/26</a:t>
             </a:fld>
             <a:endParaRPr lang="en-US"/>
           </a:p>
@@ -1951,7 +1964,7 @@
           <a:p>
             <a:fld id="{7F5A2A1A-B723-AA49-8B88-75E105055E6B}" type="datetimeFigureOut">
               <a:rPr lang="en-US" smtClean="0"/>
-              <a:t>2/18/26</a:t>
+              <a:t>2/23/26</a:t>
             </a:fld>
             <a:endParaRPr lang="en-US"/>
           </a:p>
@@ -2064,7 +2077,7 @@
           <a:p>
             <a:fld id="{7F5A2A1A-B723-AA49-8B88-75E105055E6B}" type="datetimeFigureOut">
               <a:rPr lang="en-US" smtClean="0"/>
-              <a:t>2/18/26</a:t>
+              <a:t>2/23/26</a:t>
             </a:fld>
             <a:endParaRPr lang="en-US"/>
           </a:p>
@@ -2375,7 +2388,7 @@
           <a:p>
             <a:fld id="{7F5A2A1A-B723-AA49-8B88-75E105055E6B}" type="datetimeFigureOut">
               <a:rPr lang="en-US" smtClean="0"/>
-              <a:t>2/18/26</a:t>
+              <a:t>2/23/26</a:t>
             </a:fld>
             <a:endParaRPr lang="en-US"/>
           </a:p>
@@ -2663,7 +2676,7 @@
           <a:p>
             <a:fld id="{7F5A2A1A-B723-AA49-8B88-75E105055E6B}" type="datetimeFigureOut">
               <a:rPr lang="en-US" smtClean="0"/>
-              <a:t>2/18/26</a:t>
+              <a:t>2/23/26</a:t>
             </a:fld>
             <a:endParaRPr lang="en-US"/>
           </a:p>
@@ -2904,7 +2917,7 @@
           <a:p>
             <a:fld id="{7F5A2A1A-B723-AA49-8B88-75E105055E6B}" type="datetimeFigureOut">
               <a:rPr lang="en-US" smtClean="0"/>
-              <a:t>2/18/26</a:t>
+              <a:t>2/23/26</a:t>
             </a:fld>
             <a:endParaRPr lang="en-US"/>
           </a:p>
@@ -3305,6 +3318,3331 @@
 </file>
 
 <file path=ppt/slides/slide1.xml><?xml version="1.0" encoding="utf-8"?>
+<p:sld xmlns:a="http://schemas.openxmlformats.org/drawingml/2006/main" xmlns:r="http://schemas.openxmlformats.org/officeDocument/2006/relationships" xmlns:p="http://schemas.openxmlformats.org/presentationml/2006/main">
+  <p:cSld>
+    <p:spTree>
+      <p:nvGrpSpPr>
+        <p:cNvPr id="1" name=""/>
+        <p:cNvGrpSpPr/>
+        <p:nvPr/>
+      </p:nvGrpSpPr>
+      <p:grpSpPr>
+        <a:xfrm>
+          <a:off x="0" y="0"/>
+          <a:ext cx="0" cy="0"/>
+          <a:chOff x="0" y="0"/>
+          <a:chExt cx="0" cy="0"/>
+        </a:xfrm>
+      </p:grpSpPr>
+      <p:pic>
+        <p:nvPicPr>
+          <p:cNvPr id="5" name="Picture 4">
+            <a:extLst>
+              <a:ext uri="{FF2B5EF4-FFF2-40B4-BE49-F238E27FC236}">
+                <a16:creationId xmlns:a16="http://schemas.microsoft.com/office/drawing/2014/main" id="{BF0E48F7-34BA-893D-71EA-6004075492BE}"/>
+              </a:ext>
+            </a:extLst>
+          </p:cNvPr>
+          <p:cNvPicPr>
+            <a:picLocks noChangeAspect="1"/>
+          </p:cNvPicPr>
+          <p:nvPr/>
+        </p:nvPicPr>
+        <p:blipFill>
+          <a:blip r:embed="rId2"/>
+          <a:stretch>
+            <a:fillRect/>
+          </a:stretch>
+        </p:blipFill>
+        <p:spPr>
+          <a:xfrm>
+            <a:off x="3958896" y="1466193"/>
+            <a:ext cx="4064000" cy="2286000"/>
+          </a:xfrm>
+          <a:prstGeom prst="rect">
+            <a:avLst/>
+          </a:prstGeom>
+        </p:spPr>
+      </p:pic>
+      <p:graphicFrame>
+        <p:nvGraphicFramePr>
+          <p:cNvPr id="7" name="Table 6">
+            <a:extLst>
+              <a:ext uri="{FF2B5EF4-FFF2-40B4-BE49-F238E27FC236}">
+                <a16:creationId xmlns:a16="http://schemas.microsoft.com/office/drawing/2014/main" id="{05CF62F0-7A8B-E2C9-119C-6DF88B8BF09A}"/>
+              </a:ext>
+            </a:extLst>
+          </p:cNvPr>
+          <p:cNvGraphicFramePr>
+            <a:graphicFrameLocks noGrp="1"/>
+          </p:cNvGraphicFramePr>
+          <p:nvPr>
+            <p:extLst>
+              <p:ext uri="{D42A27DB-BD31-4B8C-83A1-F6EECF244321}">
+                <p14:modId xmlns:p14="http://schemas.microsoft.com/office/powerpoint/2010/main" val="2117910206"/>
+              </p:ext>
+            </p:extLst>
+          </p:nvPr>
+        </p:nvGraphicFramePr>
+        <p:xfrm>
+          <a:off x="615655" y="85553"/>
+          <a:ext cx="2619703" cy="350520"/>
+        </p:xfrm>
+        <a:graphic>
+          <a:graphicData uri="http://schemas.openxmlformats.org/drawingml/2006/table">
+            <a:tbl>
+              <a:tblPr/>
+              <a:tblGrid>
+                <a:gridCol w="1506329">
+                  <a:extLst>
+                    <a:ext uri="{9D8B030D-6E8A-4147-A177-3AD203B41FA5}">
+                      <a16:colId xmlns:a16="http://schemas.microsoft.com/office/drawing/2014/main" val="3609948959"/>
+                    </a:ext>
+                  </a:extLst>
+                </a:gridCol>
+                <a:gridCol w="1113374">
+                  <a:extLst>
+                    <a:ext uri="{9D8B030D-6E8A-4147-A177-3AD203B41FA5}">
+                      <a16:colId xmlns:a16="http://schemas.microsoft.com/office/drawing/2014/main" val="1870654951"/>
+                    </a:ext>
+                  </a:extLst>
+                </a:gridCol>
+              </a:tblGrid>
+              <a:tr h="104775">
+                <a:tc>
+                  <a:txBody>
+                    <a:bodyPr/>
+                    <a:lstStyle/>
+                    <a:p>
+                      <a:pPr>
+                        <a:buNone/>
+                      </a:pPr>
+                      <a:r>
+                        <a:rPr lang="en-CA" b="1">
+                          <a:solidFill>
+                            <a:srgbClr val="000000"/>
+                          </a:solidFill>
+                          <a:effectLst/>
+                          <a:latin typeface="Helvetica Neue" panose="02000503000000020004" pitchFamily="2" charset="0"/>
+                        </a:rPr>
+                        <a:t>15130</a:t>
+                      </a:r>
+                      <a:endParaRPr lang="en-CA">
+                        <a:effectLst/>
+                      </a:endParaRPr>
+                    </a:p>
+                  </a:txBody>
+                  <a:tcPr marL="38100" marR="38100" marT="38100" marB="38100">
+                    <a:lnL w="9525" cap="flat" cmpd="sng" algn="ctr">
+                      <a:solidFill>
+                        <a:srgbClr val="000000"/>
+                      </a:solidFill>
+                      <a:prstDash val="solid"/>
+                      <a:round/>
+                      <a:headEnd type="none" w="med" len="med"/>
+                      <a:tailEnd type="none" w="med" len="med"/>
+                    </a:lnL>
+                    <a:lnR w="9525" cap="flat" cmpd="sng" algn="ctr">
+                      <a:solidFill>
+                        <a:srgbClr val="000000"/>
+                      </a:solidFill>
+                      <a:prstDash val="solid"/>
+                      <a:round/>
+                      <a:headEnd type="none" w="med" len="med"/>
+                      <a:tailEnd type="none" w="med" len="med"/>
+                    </a:lnR>
+                    <a:lnT w="9525" cap="flat" cmpd="sng" algn="ctr">
+                      <a:solidFill>
+                        <a:srgbClr val="000000"/>
+                      </a:solidFill>
+                      <a:prstDash val="solid"/>
+                      <a:round/>
+                      <a:headEnd type="none" w="med" len="med"/>
+                      <a:tailEnd type="none" w="med" len="med"/>
+                    </a:lnT>
+                    <a:lnB w="9525" cap="flat" cmpd="sng" algn="ctr">
+                      <a:solidFill>
+                        <a:srgbClr val="000000"/>
+                      </a:solidFill>
+                      <a:prstDash val="solid"/>
+                      <a:round/>
+                      <a:headEnd type="none" w="med" len="med"/>
+                      <a:tailEnd type="none" w="med" len="med"/>
+                    </a:lnB>
+                    <a:solidFill>
+                      <a:srgbClr val="D4D4D4"/>
+                    </a:solidFill>
+                  </a:tcPr>
+                </a:tc>
+                <a:tc>
+                  <a:txBody>
+                    <a:bodyPr/>
+                    <a:lstStyle/>
+                    <a:p>
+                      <a:pPr>
+                        <a:buNone/>
+                      </a:pPr>
+                      <a:r>
+                        <a:rPr lang="en-CA" dirty="0">
+                          <a:solidFill>
+                            <a:srgbClr val="000000"/>
+                          </a:solidFill>
+                          <a:effectLst/>
+                          <a:latin typeface="Helvetica Neue" panose="02000503000000020004" pitchFamily="2" charset="0"/>
+                        </a:rPr>
+                        <a:t>657</a:t>
+                      </a:r>
+                      <a:endParaRPr lang="en-CA" dirty="0">
+                        <a:effectLst/>
+                      </a:endParaRPr>
+                    </a:p>
+                  </a:txBody>
+                  <a:tcPr marL="38100" marR="38100" marT="38100" marB="38100">
+                    <a:lnL w="9525" cap="flat" cmpd="sng" algn="ctr">
+                      <a:solidFill>
+                        <a:srgbClr val="000000"/>
+                      </a:solidFill>
+                      <a:prstDash val="solid"/>
+                      <a:round/>
+                      <a:headEnd type="none" w="med" len="med"/>
+                      <a:tailEnd type="none" w="med" len="med"/>
+                    </a:lnL>
+                    <a:lnR w="9525" cap="flat" cmpd="sng" algn="ctr">
+                      <a:solidFill>
+                        <a:srgbClr val="000000"/>
+                      </a:solidFill>
+                      <a:prstDash val="solid"/>
+                      <a:round/>
+                      <a:headEnd type="none" w="med" len="med"/>
+                      <a:tailEnd type="none" w="med" len="med"/>
+                    </a:lnR>
+                    <a:lnT w="9525" cap="flat" cmpd="sng" algn="ctr">
+                      <a:solidFill>
+                        <a:srgbClr val="000000"/>
+                      </a:solidFill>
+                      <a:prstDash val="solid"/>
+                      <a:round/>
+                      <a:headEnd type="none" w="med" len="med"/>
+                      <a:tailEnd type="none" w="med" len="med"/>
+                    </a:lnT>
+                    <a:lnB w="9525" cap="flat" cmpd="sng" algn="ctr">
+                      <a:solidFill>
+                        <a:srgbClr val="000000"/>
+                      </a:solidFill>
+                      <a:prstDash val="solid"/>
+                      <a:round/>
+                      <a:headEnd type="none" w="med" len="med"/>
+                      <a:tailEnd type="none" w="med" len="med"/>
+                    </a:lnB>
+                    <a:noFill/>
+                  </a:tcPr>
+                </a:tc>
+                <a:extLst>
+                  <a:ext uri="{0D108BD9-81ED-4DB2-BD59-A6C34878D82A}">
+                    <a16:rowId xmlns:a16="http://schemas.microsoft.com/office/drawing/2014/main" val="1033153840"/>
+                  </a:ext>
+                </a:extLst>
+              </a:tr>
+            </a:tbl>
+          </a:graphicData>
+        </a:graphic>
+      </p:graphicFrame>
+      <p:sp>
+        <p:nvSpPr>
+          <p:cNvPr id="9" name="TextBox 8">
+            <a:extLst>
+              <a:ext uri="{FF2B5EF4-FFF2-40B4-BE49-F238E27FC236}">
+                <a16:creationId xmlns:a16="http://schemas.microsoft.com/office/drawing/2014/main" id="{D6320E56-22A7-E570-E460-BE622AEBF6C3}"/>
+              </a:ext>
+            </a:extLst>
+          </p:cNvPr>
+          <p:cNvSpPr txBox="1"/>
+          <p:nvPr/>
+        </p:nvSpPr>
+        <p:spPr>
+          <a:xfrm>
+            <a:off x="523289" y="805405"/>
+            <a:ext cx="11183007" cy="646331"/>
+          </a:xfrm>
+          <a:prstGeom prst="rect">
+            <a:avLst/>
+          </a:prstGeom>
+          <a:noFill/>
+        </p:spPr>
+        <p:txBody>
+          <a:bodyPr wrap="square">
+            <a:spAutoFit/>
+          </a:bodyPr>
+          <a:lstStyle/>
+          <a:p>
+            <a:r>
+              <a:rPr lang="en-US" dirty="0" err="1"/>
+              <a:t>air_temperature_point,Duncan</a:t>
+            </a:r>
+            <a:r>
+              <a:rPr lang="en-US" dirty="0"/>
+              <a:t> River below B.B. Creek 2,DBC2,13214,1520294008,2021-10-18 07:00:00.000000,2026-02-04 14:23:08.736102,</a:t>
+            </a:r>
+            <a:r>
+              <a:rPr lang="en-US" b="1" dirty="0"/>
+              <a:t>190</a:t>
+            </a:r>
+            <a:r>
+              <a:rPr lang="en-US" dirty="0"/>
+              <a:t>,657,15130,tongli1997</a:t>
+            </a:r>
+          </a:p>
+        </p:txBody>
+      </p:sp>
+      <p:graphicFrame>
+        <p:nvGraphicFramePr>
+          <p:cNvPr id="10" name="Table 9">
+            <a:extLst>
+              <a:ext uri="{FF2B5EF4-FFF2-40B4-BE49-F238E27FC236}">
+                <a16:creationId xmlns:a16="http://schemas.microsoft.com/office/drawing/2014/main" id="{C7ED4DBB-0936-B740-DC0E-D738C297BD1F}"/>
+              </a:ext>
+            </a:extLst>
+          </p:cNvPr>
+          <p:cNvGraphicFramePr>
+            <a:graphicFrameLocks noGrp="1"/>
+          </p:cNvGraphicFramePr>
+          <p:nvPr>
+            <p:extLst>
+              <p:ext uri="{D42A27DB-BD31-4B8C-83A1-F6EECF244321}">
+                <p14:modId xmlns:p14="http://schemas.microsoft.com/office/powerpoint/2010/main" val="4256081214"/>
+              </p:ext>
+            </p:extLst>
+          </p:nvPr>
+        </p:nvGraphicFramePr>
+        <p:xfrm>
+          <a:off x="615655" y="1752992"/>
+          <a:ext cx="10515600" cy="731520"/>
+        </p:xfrm>
+        <a:graphic>
+          <a:graphicData uri="http://schemas.openxmlformats.org/drawingml/2006/table">
+            <a:tbl>
+              <a:tblPr>
+                <a:tableStyleId>{5C22544A-7EE6-4342-B048-85BDC9FD1C3A}</a:tableStyleId>
+              </a:tblPr>
+              <a:tblGrid>
+                <a:gridCol w="3684148">
+                  <a:extLst>
+                    <a:ext uri="{9D8B030D-6E8A-4147-A177-3AD203B41FA5}">
+                      <a16:colId xmlns:a16="http://schemas.microsoft.com/office/drawing/2014/main" val="3179218826"/>
+                    </a:ext>
+                  </a:extLst>
+                </a:gridCol>
+                <a:gridCol w="665479">
+                  <a:extLst>
+                    <a:ext uri="{9D8B030D-6E8A-4147-A177-3AD203B41FA5}">
+                      <a16:colId xmlns:a16="http://schemas.microsoft.com/office/drawing/2014/main" val="3678148705"/>
+                    </a:ext>
+                  </a:extLst>
+                </a:gridCol>
+                <a:gridCol w="1126855">
+                  <a:extLst>
+                    <a:ext uri="{9D8B030D-6E8A-4147-A177-3AD203B41FA5}">
+                      <a16:colId xmlns:a16="http://schemas.microsoft.com/office/drawing/2014/main" val="519561481"/>
+                    </a:ext>
+                  </a:extLst>
+                </a:gridCol>
+                <a:gridCol w="1661983">
+                  <a:extLst>
+                    <a:ext uri="{9D8B030D-6E8A-4147-A177-3AD203B41FA5}">
+                      <a16:colId xmlns:a16="http://schemas.microsoft.com/office/drawing/2014/main" val="3881478568"/>
+                    </a:ext>
+                  </a:extLst>
+                </a:gridCol>
+                <a:gridCol w="665479">
+                  <a:extLst>
+                    <a:ext uri="{9D8B030D-6E8A-4147-A177-3AD203B41FA5}">
+                      <a16:colId xmlns:a16="http://schemas.microsoft.com/office/drawing/2014/main" val="2206088715"/>
+                    </a:ext>
+                  </a:extLst>
+                </a:gridCol>
+                <a:gridCol w="2711656">
+                  <a:extLst>
+                    <a:ext uri="{9D8B030D-6E8A-4147-A177-3AD203B41FA5}">
+                      <a16:colId xmlns:a16="http://schemas.microsoft.com/office/drawing/2014/main" val="1845962081"/>
+                    </a:ext>
+                  </a:extLst>
+                </a:gridCol>
+              </a:tblGrid>
+              <a:tr h="97812">
+                <a:tc>
+                  <a:txBody>
+                    <a:bodyPr/>
+                    <a:lstStyle/>
+                    <a:p>
+                      <a:pPr algn="l" fontAlgn="b">
+                        <a:buNone/>
+                      </a:pPr>
+                      <a:r>
+                        <a:rPr lang="en-CA" sz="1600" u="none" strike="noStrike" dirty="0">
+                          <a:effectLst/>
+                        </a:rPr>
+                        <a:t>Replaced by DBC2 - move data record, delete station</a:t>
+                      </a:r>
+                      <a:endParaRPr lang="en-CA" sz="1600" b="0" i="0" u="none" strike="noStrike" dirty="0">
+                        <a:solidFill>
+                          <a:srgbClr val="000000"/>
+                        </a:solidFill>
+                        <a:effectLst/>
+                        <a:latin typeface="Aptos Narrow" panose="020B0004020202020204" pitchFamily="34" charset="0"/>
+                      </a:endParaRPr>
+                    </a:p>
+                  </a:txBody>
+                  <a:tcPr marL="0" marR="0" marT="0" marB="0" anchor="b"/>
+                </a:tc>
+                <a:tc>
+                  <a:txBody>
+                    <a:bodyPr/>
+                    <a:lstStyle/>
+                    <a:p>
+                      <a:pPr algn="r" fontAlgn="b">
+                        <a:buNone/>
+                      </a:pPr>
+                      <a:r>
+                        <a:rPr lang="en-CA" sz="1600" u="none" strike="noStrike">
+                          <a:effectLst/>
+                        </a:rPr>
+                        <a:t>5</a:t>
+                      </a:r>
+                      <a:endParaRPr lang="en-CA" sz="1600" b="0" i="0" u="none" strike="noStrike">
+                        <a:solidFill>
+                          <a:srgbClr val="000000"/>
+                        </a:solidFill>
+                        <a:effectLst/>
+                        <a:latin typeface="Aptos Narrow" panose="020B0004020202020204" pitchFamily="34" charset="0"/>
+                      </a:endParaRPr>
+                    </a:p>
+                  </a:txBody>
+                  <a:tcPr marL="0" marR="0" marT="0" marB="0" anchor="b"/>
+                </a:tc>
+                <a:tc>
+                  <a:txBody>
+                    <a:bodyPr/>
+                    <a:lstStyle/>
+                    <a:p>
+                      <a:pPr algn="l" fontAlgn="b">
+                        <a:buNone/>
+                      </a:pPr>
+                      <a:r>
+                        <a:rPr lang="en-CA" sz="1600" u="none" strike="noStrike">
+                          <a:effectLst/>
+                        </a:rPr>
+                        <a:t>BCH-GSO-HMP</a:t>
+                      </a:r>
+                      <a:endParaRPr lang="en-CA" sz="1600" b="0" i="0" u="none" strike="noStrike">
+                        <a:solidFill>
+                          <a:srgbClr val="000000"/>
+                        </a:solidFill>
+                        <a:effectLst/>
+                        <a:latin typeface="Aptos Narrow" panose="020B0004020202020204" pitchFamily="34" charset="0"/>
+                      </a:endParaRPr>
+                    </a:p>
+                  </a:txBody>
+                  <a:tcPr marL="0" marR="0" marT="0" marB="0" anchor="b"/>
+                </a:tc>
+                <a:tc>
+                  <a:txBody>
+                    <a:bodyPr/>
+                    <a:lstStyle/>
+                    <a:p>
+                      <a:pPr algn="l" fontAlgn="b">
+                        <a:buNone/>
+                      </a:pPr>
+                      <a:r>
+                        <a:rPr lang="en-CA" sz="1600" u="none" strike="noStrike" dirty="0">
+                          <a:effectLst/>
+                        </a:rPr>
+                        <a:t>DBC -&gt; DBC2</a:t>
+                      </a:r>
+                      <a:endParaRPr lang="en-CA" sz="1600" b="0" i="0" u="none" strike="noStrike" dirty="0">
+                        <a:solidFill>
+                          <a:srgbClr val="9C0006"/>
+                        </a:solidFill>
+                        <a:effectLst/>
+                        <a:latin typeface="Aptos Narrow" panose="020B0004020202020204" pitchFamily="34" charset="0"/>
+                      </a:endParaRPr>
+                    </a:p>
+                  </a:txBody>
+                  <a:tcPr marL="0" marR="0" marT="0" marB="0" anchor="b"/>
+                </a:tc>
+                <a:tc>
+                  <a:txBody>
+                    <a:bodyPr/>
+                    <a:lstStyle/>
+                    <a:p>
+                      <a:pPr algn="r" fontAlgn="b">
+                        <a:buNone/>
+                      </a:pPr>
+                      <a:r>
+                        <a:rPr lang="en-CA" sz="1600" u="none" strike="noStrike">
+                          <a:effectLst/>
+                        </a:rPr>
+                        <a:t>2452</a:t>
+                      </a:r>
+                      <a:endParaRPr lang="en-CA" sz="1600" b="0" i="0" u="none" strike="noStrike">
+                        <a:solidFill>
+                          <a:srgbClr val="000000"/>
+                        </a:solidFill>
+                        <a:effectLst/>
+                        <a:latin typeface="Aptos Narrow" panose="020B0004020202020204" pitchFamily="34" charset="0"/>
+                      </a:endParaRPr>
+                    </a:p>
+                  </a:txBody>
+                  <a:tcPr marL="0" marR="0" marT="0" marB="0" anchor="b"/>
+                </a:tc>
+                <a:tc>
+                  <a:txBody>
+                    <a:bodyPr/>
+                    <a:lstStyle/>
+                    <a:p>
+                      <a:pPr algn="l" fontAlgn="b">
+                        <a:buNone/>
+                      </a:pPr>
+                      <a:r>
+                        <a:rPr lang="en-CA" sz="1600" u="none" strike="noStrike" dirty="0">
+                          <a:effectLst/>
+                        </a:rPr>
+                        <a:t>Duncan R. </a:t>
+                      </a:r>
+                      <a:r>
+                        <a:rPr lang="en-CA" sz="1600" u="none" strike="noStrike" dirty="0" err="1">
+                          <a:effectLst/>
+                        </a:rPr>
+                        <a:t>blw</a:t>
+                      </a:r>
+                      <a:r>
+                        <a:rPr lang="en-CA" sz="1600" u="none" strike="noStrike" dirty="0">
+                          <a:effectLst/>
+                        </a:rPr>
+                        <a:t> BB Ck -&gt; Duncan River Below Blue Berry Creek 2</a:t>
+                      </a:r>
+                      <a:endParaRPr lang="en-CA" sz="1600" b="1" i="0" u="none" strike="noStrike" dirty="0">
+                        <a:solidFill>
+                          <a:srgbClr val="9C0006"/>
+                        </a:solidFill>
+                        <a:effectLst/>
+                        <a:latin typeface="Aptos Narrow" panose="020B0004020202020204" pitchFamily="34" charset="0"/>
+                      </a:endParaRPr>
+                    </a:p>
+                  </a:txBody>
+                  <a:tcPr marL="0" marR="0" marT="0" marB="0" anchor="b"/>
+                </a:tc>
+                <a:extLst>
+                  <a:ext uri="{0D108BD9-81ED-4DB2-BD59-A6C34878D82A}">
+                    <a16:rowId xmlns:a16="http://schemas.microsoft.com/office/drawing/2014/main" val="3160386352"/>
+                  </a:ext>
+                </a:extLst>
+              </a:tr>
+            </a:tbl>
+          </a:graphicData>
+        </a:graphic>
+      </p:graphicFrame>
+      <p:pic>
+        <p:nvPicPr>
+          <p:cNvPr id="12" name="Picture 11" descr="A graph on a white sheet&#10;&#10;AI-generated content may be incorrect.">
+            <a:extLst>
+              <a:ext uri="{FF2B5EF4-FFF2-40B4-BE49-F238E27FC236}">
+                <a16:creationId xmlns:a16="http://schemas.microsoft.com/office/drawing/2014/main" id="{63A73CF9-9FA9-3F62-65DA-5494075676D6}"/>
+              </a:ext>
+            </a:extLst>
+          </p:cNvPr>
+          <p:cNvPicPr>
+            <a:picLocks noChangeAspect="1"/>
+          </p:cNvPicPr>
+          <p:nvPr/>
+        </p:nvPicPr>
+        <p:blipFill>
+          <a:blip r:embed="rId3"/>
+          <a:stretch>
+            <a:fillRect/>
+          </a:stretch>
+        </p:blipFill>
+        <p:spPr>
+          <a:xfrm>
+            <a:off x="2387600" y="2857500"/>
+            <a:ext cx="7416800" cy="4000500"/>
+          </a:xfrm>
+          <a:prstGeom prst="rect">
+            <a:avLst/>
+          </a:prstGeom>
+        </p:spPr>
+      </p:pic>
+    </p:spTree>
+    <p:extLst>
+      <p:ext uri="{BB962C8B-B14F-4D97-AF65-F5344CB8AC3E}">
+        <p14:creationId xmlns:p14="http://schemas.microsoft.com/office/powerpoint/2010/main" val="1473347933"/>
+      </p:ext>
+    </p:extLst>
+  </p:cSld>
+  <p:clrMapOvr>
+    <a:masterClrMapping/>
+  </p:clrMapOvr>
+</p:sld>
+</file>
+
+<file path=ppt/slides/slide2.xml><?xml version="1.0" encoding="utf-8"?>
+<p:sld xmlns:a="http://schemas.openxmlformats.org/drawingml/2006/main" xmlns:r="http://schemas.openxmlformats.org/officeDocument/2006/relationships" xmlns:p="http://schemas.openxmlformats.org/presentationml/2006/main">
+  <p:cSld>
+    <p:spTree>
+      <p:nvGrpSpPr>
+        <p:cNvPr id="1" name="">
+          <a:extLst>
+            <a:ext uri="{FF2B5EF4-FFF2-40B4-BE49-F238E27FC236}">
+              <a16:creationId xmlns:a16="http://schemas.microsoft.com/office/drawing/2014/main" id="{245E75D8-7425-B554-8CCC-A89774B7ABAD}"/>
+            </a:ext>
+          </a:extLst>
+        </p:cNvPr>
+        <p:cNvGrpSpPr/>
+        <p:nvPr/>
+      </p:nvGrpSpPr>
+      <p:grpSpPr>
+        <a:xfrm>
+          <a:off x="0" y="0"/>
+          <a:ext cx="0" cy="0"/>
+          <a:chOff x="0" y="0"/>
+          <a:chExt cx="0" cy="0"/>
+        </a:xfrm>
+      </p:grpSpPr>
+      <p:graphicFrame>
+        <p:nvGraphicFramePr>
+          <p:cNvPr id="3" name="Table 2">
+            <a:extLst>
+              <a:ext uri="{FF2B5EF4-FFF2-40B4-BE49-F238E27FC236}">
+                <a16:creationId xmlns:a16="http://schemas.microsoft.com/office/drawing/2014/main" id="{DC051E9E-7F29-0657-D656-1773B5031407}"/>
+              </a:ext>
+            </a:extLst>
+          </p:cNvPr>
+          <p:cNvGraphicFramePr>
+            <a:graphicFrameLocks noGrp="1"/>
+          </p:cNvGraphicFramePr>
+          <p:nvPr>
+            <p:extLst>
+              <p:ext uri="{D42A27DB-BD31-4B8C-83A1-F6EECF244321}">
+                <p14:modId xmlns:p14="http://schemas.microsoft.com/office/powerpoint/2010/main" val="3869784012"/>
+              </p:ext>
+            </p:extLst>
+          </p:nvPr>
+        </p:nvGraphicFramePr>
+        <p:xfrm>
+          <a:off x="557048" y="624996"/>
+          <a:ext cx="2630214" cy="350520"/>
+        </p:xfrm>
+        <a:graphic>
+          <a:graphicData uri="http://schemas.openxmlformats.org/drawingml/2006/table">
+            <a:tbl>
+              <a:tblPr/>
+              <a:tblGrid>
+                <a:gridCol w="1512373">
+                  <a:extLst>
+                    <a:ext uri="{9D8B030D-6E8A-4147-A177-3AD203B41FA5}">
+                      <a16:colId xmlns:a16="http://schemas.microsoft.com/office/drawing/2014/main" val="352775385"/>
+                    </a:ext>
+                  </a:extLst>
+                </a:gridCol>
+                <a:gridCol w="1117841">
+                  <a:extLst>
+                    <a:ext uri="{9D8B030D-6E8A-4147-A177-3AD203B41FA5}">
+                      <a16:colId xmlns:a16="http://schemas.microsoft.com/office/drawing/2014/main" val="3990328379"/>
+                    </a:ext>
+                  </a:extLst>
+                </a:gridCol>
+              </a:tblGrid>
+              <a:tr h="104775">
+                <a:tc>
+                  <a:txBody>
+                    <a:bodyPr/>
+                    <a:lstStyle/>
+                    <a:p>
+                      <a:pPr>
+                        <a:buNone/>
+                      </a:pPr>
+                      <a:r>
+                        <a:rPr lang="en-CA" b="1">
+                          <a:solidFill>
+                            <a:srgbClr val="000000"/>
+                          </a:solidFill>
+                          <a:effectLst/>
+                          <a:latin typeface="Helvetica Neue" panose="02000503000000020004" pitchFamily="2" charset="0"/>
+                        </a:rPr>
+                        <a:t>15106</a:t>
+                      </a:r>
+                      <a:endParaRPr lang="en-CA">
+                        <a:effectLst/>
+                      </a:endParaRPr>
+                    </a:p>
+                  </a:txBody>
+                  <a:tcPr marL="38100" marR="38100" marT="38100" marB="38100">
+                    <a:lnL w="9525" cap="flat" cmpd="sng" algn="ctr">
+                      <a:solidFill>
+                        <a:srgbClr val="000000"/>
+                      </a:solidFill>
+                      <a:prstDash val="solid"/>
+                      <a:round/>
+                      <a:headEnd type="none" w="med" len="med"/>
+                      <a:tailEnd type="none" w="med" len="med"/>
+                    </a:lnL>
+                    <a:lnR w="9525" cap="flat" cmpd="sng" algn="ctr">
+                      <a:solidFill>
+                        <a:srgbClr val="000000"/>
+                      </a:solidFill>
+                      <a:prstDash val="solid"/>
+                      <a:round/>
+                      <a:headEnd type="none" w="med" len="med"/>
+                      <a:tailEnd type="none" w="med" len="med"/>
+                    </a:lnR>
+                    <a:lnT w="9525" cap="flat" cmpd="sng" algn="ctr">
+                      <a:solidFill>
+                        <a:srgbClr val="000000"/>
+                      </a:solidFill>
+                      <a:prstDash val="solid"/>
+                      <a:round/>
+                      <a:headEnd type="none" w="med" len="med"/>
+                      <a:tailEnd type="none" w="med" len="med"/>
+                    </a:lnT>
+                    <a:lnB w="9525" cap="flat" cmpd="sng" algn="ctr">
+                      <a:solidFill>
+                        <a:srgbClr val="000000"/>
+                      </a:solidFill>
+                      <a:prstDash val="solid"/>
+                      <a:round/>
+                      <a:headEnd type="none" w="med" len="med"/>
+                      <a:tailEnd type="none" w="med" len="med"/>
+                    </a:lnB>
+                    <a:solidFill>
+                      <a:srgbClr val="D4D4D4"/>
+                    </a:solidFill>
+                  </a:tcPr>
+                </a:tc>
+                <a:tc>
+                  <a:txBody>
+                    <a:bodyPr/>
+                    <a:lstStyle/>
+                    <a:p>
+                      <a:pPr>
+                        <a:buNone/>
+                      </a:pPr>
+                      <a:r>
+                        <a:rPr lang="en-CA" dirty="0">
+                          <a:solidFill>
+                            <a:srgbClr val="000000"/>
+                          </a:solidFill>
+                          <a:effectLst/>
+                          <a:latin typeface="Helvetica Neue" panose="02000503000000020004" pitchFamily="2" charset="0"/>
+                        </a:rPr>
+                        <a:t>501</a:t>
+                      </a:r>
+                      <a:endParaRPr lang="en-CA" dirty="0">
+                        <a:effectLst/>
+                      </a:endParaRPr>
+                    </a:p>
+                  </a:txBody>
+                  <a:tcPr marL="38100" marR="38100" marT="38100" marB="38100">
+                    <a:lnL w="9525" cap="flat" cmpd="sng" algn="ctr">
+                      <a:solidFill>
+                        <a:srgbClr val="000000"/>
+                      </a:solidFill>
+                      <a:prstDash val="solid"/>
+                      <a:round/>
+                      <a:headEnd type="none" w="med" len="med"/>
+                      <a:tailEnd type="none" w="med" len="med"/>
+                    </a:lnL>
+                    <a:lnR w="9525" cap="flat" cmpd="sng" algn="ctr">
+                      <a:solidFill>
+                        <a:srgbClr val="000000"/>
+                      </a:solidFill>
+                      <a:prstDash val="solid"/>
+                      <a:round/>
+                      <a:headEnd type="none" w="med" len="med"/>
+                      <a:tailEnd type="none" w="med" len="med"/>
+                    </a:lnR>
+                    <a:lnT w="9525" cap="flat" cmpd="sng" algn="ctr">
+                      <a:solidFill>
+                        <a:srgbClr val="000000"/>
+                      </a:solidFill>
+                      <a:prstDash val="solid"/>
+                      <a:round/>
+                      <a:headEnd type="none" w="med" len="med"/>
+                      <a:tailEnd type="none" w="med" len="med"/>
+                    </a:lnT>
+                    <a:lnB w="9525" cap="flat" cmpd="sng" algn="ctr">
+                      <a:solidFill>
+                        <a:srgbClr val="000000"/>
+                      </a:solidFill>
+                      <a:prstDash val="solid"/>
+                      <a:round/>
+                      <a:headEnd type="none" w="med" len="med"/>
+                      <a:tailEnd type="none" w="med" len="med"/>
+                    </a:lnB>
+                    <a:noFill/>
+                  </a:tcPr>
+                </a:tc>
+                <a:extLst>
+                  <a:ext uri="{0D108BD9-81ED-4DB2-BD59-A6C34878D82A}">
+                    <a16:rowId xmlns:a16="http://schemas.microsoft.com/office/drawing/2014/main" val="4108552315"/>
+                  </a:ext>
+                </a:extLst>
+              </a:tr>
+            </a:tbl>
+          </a:graphicData>
+        </a:graphic>
+      </p:graphicFrame>
+      <p:pic>
+        <p:nvPicPr>
+          <p:cNvPr id="5" name="Picture 4" descr="A screenshot of a computer&#10;&#10;AI-generated content may be incorrect.">
+            <a:extLst>
+              <a:ext uri="{FF2B5EF4-FFF2-40B4-BE49-F238E27FC236}">
+                <a16:creationId xmlns:a16="http://schemas.microsoft.com/office/drawing/2014/main" id="{B74830E2-96CF-D3AB-567E-B2B10DF8738F}"/>
+              </a:ext>
+            </a:extLst>
+          </p:cNvPr>
+          <p:cNvPicPr>
+            <a:picLocks noChangeAspect="1"/>
+          </p:cNvPicPr>
+          <p:nvPr/>
+        </p:nvPicPr>
+        <p:blipFill>
+          <a:blip r:embed="rId2"/>
+          <a:stretch>
+            <a:fillRect/>
+          </a:stretch>
+        </p:blipFill>
+        <p:spPr>
+          <a:xfrm>
+            <a:off x="303047" y="2058715"/>
+            <a:ext cx="12098639" cy="4489231"/>
+          </a:xfrm>
+          <a:prstGeom prst="rect">
+            <a:avLst/>
+          </a:prstGeom>
+        </p:spPr>
+      </p:pic>
+      <p:sp>
+        <p:nvSpPr>
+          <p:cNvPr id="6" name="TextBox 5">
+            <a:extLst>
+              <a:ext uri="{FF2B5EF4-FFF2-40B4-BE49-F238E27FC236}">
+                <a16:creationId xmlns:a16="http://schemas.microsoft.com/office/drawing/2014/main" id="{3709CAA6-5975-2D03-6FAF-FEE574129029}"/>
+              </a:ext>
+            </a:extLst>
+          </p:cNvPr>
+          <p:cNvSpPr txBox="1"/>
+          <p:nvPr/>
+        </p:nvSpPr>
+        <p:spPr>
+          <a:xfrm>
+            <a:off x="2301766" y="1481959"/>
+            <a:ext cx="2469202" cy="369332"/>
+          </a:xfrm>
+          <a:prstGeom prst="rect">
+            <a:avLst/>
+          </a:prstGeom>
+          <a:noFill/>
+        </p:spPr>
+        <p:txBody>
+          <a:bodyPr wrap="none" rtlCol="0">
+            <a:spAutoFit/>
+          </a:bodyPr>
+          <a:lstStyle/>
+          <a:p>
+            <a:r>
+              <a:rPr lang="en-US" dirty="0"/>
+              <a:t>Both Insert new station</a:t>
+            </a:r>
+          </a:p>
+        </p:txBody>
+      </p:sp>
+      <p:sp>
+        <p:nvSpPr>
+          <p:cNvPr id="7" name="TextBox 6">
+            <a:extLst>
+              <a:ext uri="{FF2B5EF4-FFF2-40B4-BE49-F238E27FC236}">
+                <a16:creationId xmlns:a16="http://schemas.microsoft.com/office/drawing/2014/main" id="{AC596486-E69E-7774-48F6-A0DE6EA91CB1}"/>
+              </a:ext>
+            </a:extLst>
+          </p:cNvPr>
+          <p:cNvSpPr txBox="1"/>
+          <p:nvPr/>
+        </p:nvSpPr>
+        <p:spPr>
+          <a:xfrm>
+            <a:off x="3447393" y="571028"/>
+            <a:ext cx="554960" cy="369332"/>
+          </a:xfrm>
+          <a:prstGeom prst="rect">
+            <a:avLst/>
+          </a:prstGeom>
+          <a:noFill/>
+        </p:spPr>
+        <p:txBody>
+          <a:bodyPr wrap="none" rtlCol="0">
+            <a:spAutoFit/>
+          </a:bodyPr>
+          <a:lstStyle/>
+          <a:p>
+            <a:r>
+              <a:rPr lang="en-US" dirty="0"/>
+              <a:t>833</a:t>
+            </a:r>
+          </a:p>
+        </p:txBody>
+      </p:sp>
+    </p:spTree>
+    <p:extLst>
+      <p:ext uri="{BB962C8B-B14F-4D97-AF65-F5344CB8AC3E}">
+        <p14:creationId xmlns:p14="http://schemas.microsoft.com/office/powerpoint/2010/main" val="17027110"/>
+      </p:ext>
+    </p:extLst>
+  </p:cSld>
+  <p:clrMapOvr>
+    <a:masterClrMapping/>
+  </p:clrMapOvr>
+</p:sld>
+</file>
+
+<file path=ppt/slides/slide3.xml><?xml version="1.0" encoding="utf-8"?>
+<p:sld xmlns:a="http://schemas.openxmlformats.org/drawingml/2006/main" xmlns:r="http://schemas.openxmlformats.org/officeDocument/2006/relationships" xmlns:p="http://schemas.openxmlformats.org/presentationml/2006/main">
+  <p:cSld>
+    <p:spTree>
+      <p:nvGrpSpPr>
+        <p:cNvPr id="1" name="">
+          <a:extLst>
+            <a:ext uri="{FF2B5EF4-FFF2-40B4-BE49-F238E27FC236}">
+              <a16:creationId xmlns:a16="http://schemas.microsoft.com/office/drawing/2014/main" id="{FC15F2F3-D841-15AB-685F-1EC7FF797A85}"/>
+            </a:ext>
+          </a:extLst>
+        </p:cNvPr>
+        <p:cNvGrpSpPr/>
+        <p:nvPr/>
+      </p:nvGrpSpPr>
+      <p:grpSpPr>
+        <a:xfrm>
+          <a:off x="0" y="0"/>
+          <a:ext cx="0" cy="0"/>
+          <a:chOff x="0" y="0"/>
+          <a:chExt cx="0" cy="0"/>
+        </a:xfrm>
+      </p:grpSpPr>
+      <p:sp>
+        <p:nvSpPr>
+          <p:cNvPr id="2" name="TextBox 1">
+            <a:extLst>
+              <a:ext uri="{FF2B5EF4-FFF2-40B4-BE49-F238E27FC236}">
+                <a16:creationId xmlns:a16="http://schemas.microsoft.com/office/drawing/2014/main" id="{2251C83A-C13C-2E77-A100-63D9425B911E}"/>
+              </a:ext>
+            </a:extLst>
+          </p:cNvPr>
+          <p:cNvSpPr txBox="1"/>
+          <p:nvPr/>
+        </p:nvSpPr>
+        <p:spPr>
+          <a:xfrm>
+            <a:off x="695739" y="298174"/>
+            <a:ext cx="2224648" cy="646331"/>
+          </a:xfrm>
+          <a:prstGeom prst="rect">
+            <a:avLst/>
+          </a:prstGeom>
+          <a:noFill/>
+        </p:spPr>
+        <p:txBody>
+          <a:bodyPr wrap="none" rtlCol="0">
+            <a:spAutoFit/>
+          </a:bodyPr>
+          <a:lstStyle/>
+          <a:p>
+            <a:r>
+              <a:rPr lang="en-CA" dirty="0"/>
+              <a:t> </a:t>
+            </a:r>
+            <a:r>
+              <a:rPr lang="en-CA" dirty="0" err="1"/>
+              <a:t>h.history_id</a:t>
+            </a:r>
+            <a:r>
+              <a:rPr lang="en-CA" dirty="0"/>
+              <a:t> = 15133</a:t>
+            </a:r>
+            <a:br>
+              <a:rPr lang="en-CA" dirty="0"/>
+            </a:br>
+            <a:r>
+              <a:rPr lang="en-CA" dirty="0"/>
+              <a:t>and </a:t>
+            </a:r>
+            <a:r>
+              <a:rPr lang="en-CA" dirty="0" err="1"/>
+              <a:t>v.vars_id</a:t>
+            </a:r>
+            <a:r>
+              <a:rPr lang="en-CA" dirty="0"/>
+              <a:t> = 468</a:t>
+            </a:r>
+            <a:endParaRPr lang="en-US" dirty="0"/>
+          </a:p>
+        </p:txBody>
+      </p:sp>
+      <p:pic>
+        <p:nvPicPr>
+          <p:cNvPr id="6" name="Picture 5" descr="A screenshot of a computer&#10;&#10;AI-generated content may be incorrect.">
+            <a:extLst>
+              <a:ext uri="{FF2B5EF4-FFF2-40B4-BE49-F238E27FC236}">
+                <a16:creationId xmlns:a16="http://schemas.microsoft.com/office/drawing/2014/main" id="{C9E88FE2-0586-ADA2-2E54-AAF3230BDF78}"/>
+              </a:ext>
+            </a:extLst>
+          </p:cNvPr>
+          <p:cNvPicPr>
+            <a:picLocks noChangeAspect="1"/>
+          </p:cNvPicPr>
+          <p:nvPr/>
+        </p:nvPicPr>
+        <p:blipFill>
+          <a:blip r:embed="rId2"/>
+          <a:stretch>
+            <a:fillRect/>
+          </a:stretch>
+        </p:blipFill>
+        <p:spPr>
+          <a:xfrm>
+            <a:off x="805123" y="1185445"/>
+            <a:ext cx="10581754" cy="2770330"/>
+          </a:xfrm>
+          <a:prstGeom prst="rect">
+            <a:avLst/>
+          </a:prstGeom>
+        </p:spPr>
+      </p:pic>
+      <p:graphicFrame>
+        <p:nvGraphicFramePr>
+          <p:cNvPr id="8" name="Table 7">
+            <a:extLst>
+              <a:ext uri="{FF2B5EF4-FFF2-40B4-BE49-F238E27FC236}">
+                <a16:creationId xmlns:a16="http://schemas.microsoft.com/office/drawing/2014/main" id="{C43C6561-EA92-E8E3-8021-65D3E9085A4F}"/>
+              </a:ext>
+            </a:extLst>
+          </p:cNvPr>
+          <p:cNvGraphicFramePr>
+            <a:graphicFrameLocks noGrp="1"/>
+          </p:cNvGraphicFramePr>
+          <p:nvPr>
+            <p:extLst>
+              <p:ext uri="{D42A27DB-BD31-4B8C-83A1-F6EECF244321}">
+                <p14:modId xmlns:p14="http://schemas.microsoft.com/office/powerpoint/2010/main" val="1571919448"/>
+              </p:ext>
+            </p:extLst>
+          </p:nvPr>
+        </p:nvGraphicFramePr>
+        <p:xfrm>
+          <a:off x="871278" y="4179405"/>
+          <a:ext cx="10515599" cy="152400"/>
+        </p:xfrm>
+        <a:graphic>
+          <a:graphicData uri="http://schemas.openxmlformats.org/drawingml/2006/table">
+            <a:tbl>
+              <a:tblPr>
+                <a:tableStyleId>{5C22544A-7EE6-4342-B048-85BDC9FD1C3A}</a:tableStyleId>
+              </a:tblPr>
+              <a:tblGrid>
+                <a:gridCol w="4964287">
+                  <a:extLst>
+                    <a:ext uri="{9D8B030D-6E8A-4147-A177-3AD203B41FA5}">
+                      <a16:colId xmlns:a16="http://schemas.microsoft.com/office/drawing/2014/main" val="206212892"/>
+                    </a:ext>
+                  </a:extLst>
+                </a:gridCol>
+                <a:gridCol w="896715">
+                  <a:extLst>
+                    <a:ext uri="{9D8B030D-6E8A-4147-A177-3AD203B41FA5}">
+                      <a16:colId xmlns:a16="http://schemas.microsoft.com/office/drawing/2014/main" val="940495906"/>
+                    </a:ext>
+                  </a:extLst>
+                </a:gridCol>
+                <a:gridCol w="1518406">
+                  <a:extLst>
+                    <a:ext uri="{9D8B030D-6E8A-4147-A177-3AD203B41FA5}">
+                      <a16:colId xmlns:a16="http://schemas.microsoft.com/office/drawing/2014/main" val="1298690587"/>
+                    </a:ext>
+                  </a:extLst>
+                </a:gridCol>
+                <a:gridCol w="2239476">
+                  <a:extLst>
+                    <a:ext uri="{9D8B030D-6E8A-4147-A177-3AD203B41FA5}">
+                      <a16:colId xmlns:a16="http://schemas.microsoft.com/office/drawing/2014/main" val="2029089944"/>
+                    </a:ext>
+                  </a:extLst>
+                </a:gridCol>
+                <a:gridCol w="896715">
+                  <a:extLst>
+                    <a:ext uri="{9D8B030D-6E8A-4147-A177-3AD203B41FA5}">
+                      <a16:colId xmlns:a16="http://schemas.microsoft.com/office/drawing/2014/main" val="3910428161"/>
+                    </a:ext>
+                  </a:extLst>
+                </a:gridCol>
+              </a:tblGrid>
+              <a:tr h="131792">
+                <a:tc>
+                  <a:txBody>
+                    <a:bodyPr/>
+                    <a:lstStyle/>
+                    <a:p>
+                      <a:pPr algn="l" fontAlgn="b">
+                        <a:buNone/>
+                      </a:pPr>
+                      <a:r>
+                        <a:rPr lang="en-CA" sz="1000" u="none" strike="noStrike">
+                          <a:effectLst/>
+                        </a:rPr>
+                        <a:t>Concatenate data with 13217, then delete</a:t>
+                      </a:r>
+                      <a:endParaRPr lang="en-CA" sz="1000" b="1" i="0" u="none" strike="noStrike">
+                        <a:solidFill>
+                          <a:srgbClr val="000000"/>
+                        </a:solidFill>
+                        <a:effectLst/>
+                        <a:latin typeface="Aptos Narrow" panose="020B0004020202020204" pitchFamily="34" charset="0"/>
+                      </a:endParaRPr>
+                    </a:p>
+                  </a:txBody>
+                  <a:tcPr marL="0" marR="0" marT="0" marB="0" anchor="b"/>
+                </a:tc>
+                <a:tc>
+                  <a:txBody>
+                    <a:bodyPr/>
+                    <a:lstStyle/>
+                    <a:p>
+                      <a:pPr algn="r" fontAlgn="b">
+                        <a:buNone/>
+                      </a:pPr>
+                      <a:r>
+                        <a:rPr lang="en-CA" sz="1000" u="none" strike="noStrike">
+                          <a:effectLst/>
+                        </a:rPr>
+                        <a:t>5</a:t>
+                      </a:r>
+                      <a:endParaRPr lang="en-CA" sz="1000" b="1" i="0" u="none" strike="noStrike">
+                        <a:solidFill>
+                          <a:srgbClr val="FF0000"/>
+                        </a:solidFill>
+                        <a:effectLst/>
+                        <a:latin typeface="Aptos Narrow" panose="020B0004020202020204" pitchFamily="34" charset="0"/>
+                      </a:endParaRPr>
+                    </a:p>
+                  </a:txBody>
+                  <a:tcPr marL="0" marR="0" marT="0" marB="0" anchor="b"/>
+                </a:tc>
+                <a:tc>
+                  <a:txBody>
+                    <a:bodyPr/>
+                    <a:lstStyle/>
+                    <a:p>
+                      <a:pPr algn="l" fontAlgn="b">
+                        <a:buNone/>
+                      </a:pPr>
+                      <a:r>
+                        <a:rPr lang="en-CA" sz="1000" u="none" strike="noStrike">
+                          <a:effectLst/>
+                        </a:rPr>
+                        <a:t>BCH-GSO-HMP</a:t>
+                      </a:r>
+                      <a:endParaRPr lang="en-CA" sz="1000" b="1" i="0" u="none" strike="noStrike">
+                        <a:solidFill>
+                          <a:srgbClr val="FF0000"/>
+                        </a:solidFill>
+                        <a:effectLst/>
+                        <a:latin typeface="Aptos Narrow" panose="020B0004020202020204" pitchFamily="34" charset="0"/>
+                      </a:endParaRPr>
+                    </a:p>
+                  </a:txBody>
+                  <a:tcPr marL="0" marR="0" marT="0" marB="0" anchor="b"/>
+                </a:tc>
+                <a:tc>
+                  <a:txBody>
+                    <a:bodyPr/>
+                    <a:lstStyle/>
+                    <a:p>
+                      <a:pPr algn="l" fontAlgn="b">
+                        <a:buNone/>
+                      </a:pPr>
+                      <a:r>
+                        <a:rPr lang="en-CA" sz="1000" u="none" strike="noStrike">
+                          <a:effectLst/>
+                        </a:rPr>
+                        <a:t>JHL</a:t>
+                      </a:r>
+                      <a:endParaRPr lang="en-CA" sz="1000" b="1" i="0" u="none" strike="noStrike">
+                        <a:solidFill>
+                          <a:srgbClr val="FF0000"/>
+                        </a:solidFill>
+                        <a:effectLst/>
+                        <a:latin typeface="Aptos Narrow" panose="020B0004020202020204" pitchFamily="34" charset="0"/>
+                      </a:endParaRPr>
+                    </a:p>
+                  </a:txBody>
+                  <a:tcPr marL="0" marR="0" marT="0" marB="0" anchor="b"/>
+                </a:tc>
+                <a:tc>
+                  <a:txBody>
+                    <a:bodyPr/>
+                    <a:lstStyle/>
+                    <a:p>
+                      <a:pPr algn="r" fontAlgn="b">
+                        <a:buNone/>
+                      </a:pPr>
+                      <a:r>
+                        <a:rPr lang="en-CA" sz="1000" u="none" strike="noStrike" dirty="0">
+                          <a:effectLst/>
+                        </a:rPr>
+                        <a:t>13128</a:t>
+                      </a:r>
+                      <a:endParaRPr lang="en-CA" sz="1000" b="1" i="0" u="none" strike="noStrike" dirty="0">
+                        <a:solidFill>
+                          <a:srgbClr val="FF0000"/>
+                        </a:solidFill>
+                        <a:effectLst/>
+                        <a:latin typeface="Aptos Narrow" panose="020B0004020202020204" pitchFamily="34" charset="0"/>
+                      </a:endParaRPr>
+                    </a:p>
+                  </a:txBody>
+                  <a:tcPr marL="0" marR="0" marT="0" marB="0" anchor="b"/>
+                </a:tc>
+                <a:extLst>
+                  <a:ext uri="{0D108BD9-81ED-4DB2-BD59-A6C34878D82A}">
+                    <a16:rowId xmlns:a16="http://schemas.microsoft.com/office/drawing/2014/main" val="2505353649"/>
+                  </a:ext>
+                </a:extLst>
+              </a:tr>
+            </a:tbl>
+          </a:graphicData>
+        </a:graphic>
+      </p:graphicFrame>
+      <p:graphicFrame>
+        <p:nvGraphicFramePr>
+          <p:cNvPr id="9" name="Table 8">
+            <a:extLst>
+              <a:ext uri="{FF2B5EF4-FFF2-40B4-BE49-F238E27FC236}">
+                <a16:creationId xmlns:a16="http://schemas.microsoft.com/office/drawing/2014/main" id="{E1CCCC29-5463-8307-3571-F053EC062AD3}"/>
+              </a:ext>
+            </a:extLst>
+          </p:cNvPr>
+          <p:cNvGraphicFramePr>
+            <a:graphicFrameLocks noGrp="1"/>
+          </p:cNvGraphicFramePr>
+          <p:nvPr>
+            <p:extLst>
+              <p:ext uri="{D42A27DB-BD31-4B8C-83A1-F6EECF244321}">
+                <p14:modId xmlns:p14="http://schemas.microsoft.com/office/powerpoint/2010/main" val="985744149"/>
+              </p:ext>
+            </p:extLst>
+          </p:nvPr>
+        </p:nvGraphicFramePr>
+        <p:xfrm>
+          <a:off x="838200" y="4479235"/>
+          <a:ext cx="10515600" cy="152400"/>
+        </p:xfrm>
+        <a:graphic>
+          <a:graphicData uri="http://schemas.openxmlformats.org/drawingml/2006/table">
+            <a:tbl>
+              <a:tblPr>
+                <a:tableStyleId>{5C22544A-7EE6-4342-B048-85BDC9FD1C3A}</a:tableStyleId>
+              </a:tblPr>
+              <a:tblGrid>
+                <a:gridCol w="3684148">
+                  <a:extLst>
+                    <a:ext uri="{9D8B030D-6E8A-4147-A177-3AD203B41FA5}">
+                      <a16:colId xmlns:a16="http://schemas.microsoft.com/office/drawing/2014/main" val="1755314285"/>
+                    </a:ext>
+                  </a:extLst>
+                </a:gridCol>
+                <a:gridCol w="665479">
+                  <a:extLst>
+                    <a:ext uri="{9D8B030D-6E8A-4147-A177-3AD203B41FA5}">
+                      <a16:colId xmlns:a16="http://schemas.microsoft.com/office/drawing/2014/main" val="499479812"/>
+                    </a:ext>
+                  </a:extLst>
+                </a:gridCol>
+                <a:gridCol w="1126855">
+                  <a:extLst>
+                    <a:ext uri="{9D8B030D-6E8A-4147-A177-3AD203B41FA5}">
+                      <a16:colId xmlns:a16="http://schemas.microsoft.com/office/drawing/2014/main" val="146650338"/>
+                    </a:ext>
+                  </a:extLst>
+                </a:gridCol>
+                <a:gridCol w="1661983">
+                  <a:extLst>
+                    <a:ext uri="{9D8B030D-6E8A-4147-A177-3AD203B41FA5}">
+                      <a16:colId xmlns:a16="http://schemas.microsoft.com/office/drawing/2014/main" val="4129779714"/>
+                    </a:ext>
+                  </a:extLst>
+                </a:gridCol>
+                <a:gridCol w="665479">
+                  <a:extLst>
+                    <a:ext uri="{9D8B030D-6E8A-4147-A177-3AD203B41FA5}">
+                      <a16:colId xmlns:a16="http://schemas.microsoft.com/office/drawing/2014/main" val="1664241055"/>
+                    </a:ext>
+                  </a:extLst>
+                </a:gridCol>
+                <a:gridCol w="2711656">
+                  <a:extLst>
+                    <a:ext uri="{9D8B030D-6E8A-4147-A177-3AD203B41FA5}">
+                      <a16:colId xmlns:a16="http://schemas.microsoft.com/office/drawing/2014/main" val="2808767945"/>
+                    </a:ext>
+                  </a:extLst>
+                </a:gridCol>
+              </a:tblGrid>
+              <a:tr h="97812">
+                <a:tc>
+                  <a:txBody>
+                    <a:bodyPr/>
+                    <a:lstStyle/>
+                    <a:p>
+                      <a:pPr algn="l" fontAlgn="b">
+                        <a:buNone/>
+                      </a:pPr>
+                      <a:r>
+                        <a:rPr lang="en-CA" sz="1000" u="none" strike="noStrike">
+                          <a:effectLst/>
+                        </a:rPr>
+                        <a:t>This is the correct station to use</a:t>
+                      </a:r>
+                      <a:endParaRPr lang="en-CA" sz="1000" b="1" i="0" u="none" strike="noStrike">
+                        <a:solidFill>
+                          <a:srgbClr val="FF0000"/>
+                        </a:solidFill>
+                        <a:effectLst/>
+                        <a:latin typeface="Aptos Narrow" panose="020B0004020202020204" pitchFamily="34" charset="0"/>
+                      </a:endParaRPr>
+                    </a:p>
+                  </a:txBody>
+                  <a:tcPr marL="0" marR="0" marT="0" marB="0" anchor="b"/>
+                </a:tc>
+                <a:tc>
+                  <a:txBody>
+                    <a:bodyPr/>
+                    <a:lstStyle/>
+                    <a:p>
+                      <a:pPr algn="r" fontAlgn="b">
+                        <a:buNone/>
+                      </a:pPr>
+                      <a:r>
+                        <a:rPr lang="en-CA" sz="1000" u="none" strike="noStrike">
+                          <a:effectLst/>
+                        </a:rPr>
+                        <a:t>5</a:t>
+                      </a:r>
+                      <a:endParaRPr lang="en-CA" sz="1000" b="1" i="0" u="none" strike="noStrike">
+                        <a:solidFill>
+                          <a:srgbClr val="FF0000"/>
+                        </a:solidFill>
+                        <a:effectLst/>
+                        <a:latin typeface="Aptos Narrow" panose="020B0004020202020204" pitchFamily="34" charset="0"/>
+                      </a:endParaRPr>
+                    </a:p>
+                  </a:txBody>
+                  <a:tcPr marL="0" marR="0" marT="0" marB="0" anchor="b"/>
+                </a:tc>
+                <a:tc>
+                  <a:txBody>
+                    <a:bodyPr/>
+                    <a:lstStyle/>
+                    <a:p>
+                      <a:pPr algn="l" fontAlgn="b">
+                        <a:buNone/>
+                      </a:pPr>
+                      <a:r>
+                        <a:rPr lang="en-CA" sz="1000" u="none" strike="noStrike">
+                          <a:effectLst/>
+                        </a:rPr>
+                        <a:t>BCH-GSO-HMP</a:t>
+                      </a:r>
+                      <a:endParaRPr lang="en-CA" sz="1000" b="1" i="0" u="none" strike="noStrike">
+                        <a:solidFill>
+                          <a:srgbClr val="FF0000"/>
+                        </a:solidFill>
+                        <a:effectLst/>
+                        <a:latin typeface="Aptos Narrow" panose="020B0004020202020204" pitchFamily="34" charset="0"/>
+                      </a:endParaRPr>
+                    </a:p>
+                  </a:txBody>
+                  <a:tcPr marL="0" marR="0" marT="0" marB="0" anchor="b"/>
+                </a:tc>
+                <a:tc>
+                  <a:txBody>
+                    <a:bodyPr/>
+                    <a:lstStyle/>
+                    <a:p>
+                      <a:pPr algn="l" fontAlgn="b">
+                        <a:buNone/>
+                      </a:pPr>
+                      <a:r>
+                        <a:rPr lang="en-CA" sz="1000" u="none" strike="noStrike">
+                          <a:effectLst/>
+                        </a:rPr>
+                        <a:t>JHL</a:t>
+                      </a:r>
+                      <a:endParaRPr lang="en-CA" sz="1000" b="1" i="0" u="none" strike="noStrike">
+                        <a:solidFill>
+                          <a:srgbClr val="FF0000"/>
+                        </a:solidFill>
+                        <a:effectLst/>
+                        <a:latin typeface="Aptos Narrow" panose="020B0004020202020204" pitchFamily="34" charset="0"/>
+                      </a:endParaRPr>
+                    </a:p>
+                  </a:txBody>
+                  <a:tcPr marL="0" marR="0" marT="0" marB="0" anchor="b"/>
+                </a:tc>
+                <a:tc>
+                  <a:txBody>
+                    <a:bodyPr/>
+                    <a:lstStyle/>
+                    <a:p>
+                      <a:pPr algn="r" fontAlgn="b">
+                        <a:buNone/>
+                      </a:pPr>
+                      <a:r>
+                        <a:rPr lang="en-CA" sz="1000" u="none" strike="noStrike">
+                          <a:effectLst/>
+                        </a:rPr>
+                        <a:t>13217</a:t>
+                      </a:r>
+                      <a:endParaRPr lang="en-CA" sz="1000" b="1" i="0" u="none" strike="noStrike">
+                        <a:solidFill>
+                          <a:srgbClr val="FF0000"/>
+                        </a:solidFill>
+                        <a:effectLst/>
+                        <a:latin typeface="Aptos Narrow" panose="020B0004020202020204" pitchFamily="34" charset="0"/>
+                      </a:endParaRPr>
+                    </a:p>
+                  </a:txBody>
+                  <a:tcPr marL="0" marR="0" marT="0" marB="0" anchor="b"/>
+                </a:tc>
+                <a:tc>
+                  <a:txBody>
+                    <a:bodyPr/>
+                    <a:lstStyle/>
+                    <a:p>
+                      <a:pPr algn="l" fontAlgn="b">
+                        <a:buNone/>
+                      </a:pPr>
+                      <a:r>
+                        <a:rPr lang="en-CA" sz="1000" u="none" strike="noStrike" dirty="0">
+                          <a:effectLst/>
+                        </a:rPr>
+                        <a:t>Johanson Lake</a:t>
+                      </a:r>
+                      <a:endParaRPr lang="en-CA" sz="1000" b="1" i="0" u="none" strike="noStrike" dirty="0">
+                        <a:solidFill>
+                          <a:srgbClr val="FF0000"/>
+                        </a:solidFill>
+                        <a:effectLst/>
+                        <a:latin typeface="Aptos Narrow" panose="020B0004020202020204" pitchFamily="34" charset="0"/>
+                      </a:endParaRPr>
+                    </a:p>
+                  </a:txBody>
+                  <a:tcPr marL="0" marR="0" marT="0" marB="0" anchor="b"/>
+                </a:tc>
+                <a:extLst>
+                  <a:ext uri="{0D108BD9-81ED-4DB2-BD59-A6C34878D82A}">
+                    <a16:rowId xmlns:a16="http://schemas.microsoft.com/office/drawing/2014/main" val="3765989906"/>
+                  </a:ext>
+                </a:extLst>
+              </a:tr>
+            </a:tbl>
+          </a:graphicData>
+        </a:graphic>
+      </p:graphicFrame>
+      <p:pic>
+        <p:nvPicPr>
+          <p:cNvPr id="11" name="Picture 10" descr="A graph showing the growth of the stock market&#10;&#10;AI-generated content may be incorrect.">
+            <a:extLst>
+              <a:ext uri="{FF2B5EF4-FFF2-40B4-BE49-F238E27FC236}">
+                <a16:creationId xmlns:a16="http://schemas.microsoft.com/office/drawing/2014/main" id="{D6F73877-871D-80D7-BE9C-535AB0232C99}"/>
+              </a:ext>
+            </a:extLst>
+          </p:cNvPr>
+          <p:cNvPicPr>
+            <a:picLocks noChangeAspect="1"/>
+          </p:cNvPicPr>
+          <p:nvPr/>
+        </p:nvPicPr>
+        <p:blipFill>
+          <a:blip r:embed="rId3"/>
+          <a:stretch>
+            <a:fillRect/>
+          </a:stretch>
+        </p:blipFill>
+        <p:spPr>
+          <a:xfrm>
+            <a:off x="1519612" y="4855265"/>
+            <a:ext cx="7772400" cy="2500377"/>
+          </a:xfrm>
+          <a:prstGeom prst="rect">
+            <a:avLst/>
+          </a:prstGeom>
+        </p:spPr>
+      </p:pic>
+      <p:sp>
+        <p:nvSpPr>
+          <p:cNvPr id="12" name="Rectangle 11">
+            <a:extLst>
+              <a:ext uri="{FF2B5EF4-FFF2-40B4-BE49-F238E27FC236}">
+                <a16:creationId xmlns:a16="http://schemas.microsoft.com/office/drawing/2014/main" id="{DBF28AB5-1149-B09C-91D6-F4E79CE9E370}"/>
+              </a:ext>
+            </a:extLst>
+          </p:cNvPr>
+          <p:cNvSpPr/>
+          <p:nvPr/>
+        </p:nvSpPr>
+        <p:spPr>
+          <a:xfrm>
+            <a:off x="6897757" y="5874026"/>
+            <a:ext cx="1967947" cy="983974"/>
+          </a:xfrm>
+          <a:prstGeom prst="rect">
+            <a:avLst/>
+          </a:prstGeom>
+          <a:noFill/>
+        </p:spPr>
+        <p:style>
+          <a:lnRef idx="2">
+            <a:schemeClr val="accent1">
+              <a:shade val="15000"/>
+            </a:schemeClr>
+          </a:lnRef>
+          <a:fillRef idx="1">
+            <a:schemeClr val="accent1"/>
+          </a:fillRef>
+          <a:effectRef idx="0">
+            <a:schemeClr val="accent1"/>
+          </a:effectRef>
+          <a:fontRef idx="minor">
+            <a:schemeClr val="lt1"/>
+          </a:fontRef>
+        </p:style>
+        <p:txBody>
+          <a:bodyPr rtlCol="0" anchor="ctr"/>
+          <a:lstStyle/>
+          <a:p>
+            <a:pPr algn="ctr"/>
+            <a:endParaRPr lang="en-US"/>
+          </a:p>
+        </p:txBody>
+      </p:sp>
+    </p:spTree>
+    <p:extLst>
+      <p:ext uri="{BB962C8B-B14F-4D97-AF65-F5344CB8AC3E}">
+        <p14:creationId xmlns:p14="http://schemas.microsoft.com/office/powerpoint/2010/main" val="976943193"/>
+      </p:ext>
+    </p:extLst>
+  </p:cSld>
+  <p:clrMapOvr>
+    <a:masterClrMapping/>
+  </p:clrMapOvr>
+</p:sld>
+</file>
+
+<file path=ppt/slides/slide4.xml><?xml version="1.0" encoding="utf-8"?>
+<p:sld xmlns:a="http://schemas.openxmlformats.org/drawingml/2006/main" xmlns:r="http://schemas.openxmlformats.org/officeDocument/2006/relationships" xmlns:p="http://schemas.openxmlformats.org/presentationml/2006/main">
+  <p:cSld>
+    <p:spTree>
+      <p:nvGrpSpPr>
+        <p:cNvPr id="1" name="">
+          <a:extLst>
+            <a:ext uri="{FF2B5EF4-FFF2-40B4-BE49-F238E27FC236}">
+              <a16:creationId xmlns:a16="http://schemas.microsoft.com/office/drawing/2014/main" id="{7EC51F15-25E1-2E7A-5531-6FA9A562651E}"/>
+            </a:ext>
+          </a:extLst>
+        </p:cNvPr>
+        <p:cNvGrpSpPr/>
+        <p:nvPr/>
+      </p:nvGrpSpPr>
+      <p:grpSpPr>
+        <a:xfrm>
+          <a:off x="0" y="0"/>
+          <a:ext cx="0" cy="0"/>
+          <a:chOff x="0" y="0"/>
+          <a:chExt cx="0" cy="0"/>
+        </a:xfrm>
+      </p:grpSpPr>
+      <p:pic>
+        <p:nvPicPr>
+          <p:cNvPr id="3" name="Picture 2" descr="A screenshot of a computer&#10;&#10;AI-generated content may be incorrect.">
+            <a:extLst>
+              <a:ext uri="{FF2B5EF4-FFF2-40B4-BE49-F238E27FC236}">
+                <a16:creationId xmlns:a16="http://schemas.microsoft.com/office/drawing/2014/main" id="{433F6D82-2097-582C-6BC6-0D967FB1C16A}"/>
+              </a:ext>
+            </a:extLst>
+          </p:cNvPr>
+          <p:cNvPicPr>
+            <a:picLocks noChangeAspect="1"/>
+          </p:cNvPicPr>
+          <p:nvPr/>
+        </p:nvPicPr>
+        <p:blipFill>
+          <a:blip r:embed="rId2"/>
+          <a:stretch>
+            <a:fillRect/>
+          </a:stretch>
+        </p:blipFill>
+        <p:spPr>
+          <a:xfrm>
+            <a:off x="141356" y="1364974"/>
+            <a:ext cx="9986617" cy="4392020"/>
+          </a:xfrm>
+          <a:prstGeom prst="rect">
+            <a:avLst/>
+          </a:prstGeom>
+        </p:spPr>
+      </p:pic>
+      <p:pic>
+        <p:nvPicPr>
+          <p:cNvPr id="5" name="Picture 4" descr="A screenshot of a table&#10;&#10;AI-generated content may be incorrect.">
+            <a:extLst>
+              <a:ext uri="{FF2B5EF4-FFF2-40B4-BE49-F238E27FC236}">
+                <a16:creationId xmlns:a16="http://schemas.microsoft.com/office/drawing/2014/main" id="{1E5CCB67-28CA-6742-943E-146E379A3DEA}"/>
+              </a:ext>
+            </a:extLst>
+          </p:cNvPr>
+          <p:cNvPicPr>
+            <a:picLocks noChangeAspect="1"/>
+          </p:cNvPicPr>
+          <p:nvPr/>
+        </p:nvPicPr>
+        <p:blipFill>
+          <a:blip r:embed="rId3"/>
+          <a:stretch>
+            <a:fillRect/>
+          </a:stretch>
+        </p:blipFill>
+        <p:spPr>
+          <a:xfrm>
+            <a:off x="7756752" y="213419"/>
+            <a:ext cx="4216400" cy="3403600"/>
+          </a:xfrm>
+          <a:prstGeom prst="rect">
+            <a:avLst/>
+          </a:prstGeom>
+        </p:spPr>
+      </p:pic>
+      <p:sp>
+        <p:nvSpPr>
+          <p:cNvPr id="6" name="TextBox 5">
+            <a:extLst>
+              <a:ext uri="{FF2B5EF4-FFF2-40B4-BE49-F238E27FC236}">
+                <a16:creationId xmlns:a16="http://schemas.microsoft.com/office/drawing/2014/main" id="{3F881A0F-BA08-550E-1215-3368219C5F70}"/>
+              </a:ext>
+            </a:extLst>
+          </p:cNvPr>
+          <p:cNvSpPr txBox="1"/>
+          <p:nvPr/>
+        </p:nvSpPr>
+        <p:spPr>
+          <a:xfrm>
+            <a:off x="715617" y="506896"/>
+            <a:ext cx="2199898" cy="369332"/>
+          </a:xfrm>
+          <a:prstGeom prst="rect">
+            <a:avLst/>
+          </a:prstGeom>
+          <a:noFill/>
+        </p:spPr>
+        <p:txBody>
+          <a:bodyPr wrap="none" rtlCol="0">
+            <a:spAutoFit/>
+          </a:bodyPr>
+          <a:lstStyle/>
+          <a:p>
+            <a:r>
+              <a:rPr lang="en-US" dirty="0"/>
+              <a:t>Fern new data insert</a:t>
+            </a:r>
+          </a:p>
+        </p:txBody>
+      </p:sp>
+    </p:spTree>
+    <p:extLst>
+      <p:ext uri="{BB962C8B-B14F-4D97-AF65-F5344CB8AC3E}">
+        <p14:creationId xmlns:p14="http://schemas.microsoft.com/office/powerpoint/2010/main" val="473850492"/>
+      </p:ext>
+    </p:extLst>
+  </p:cSld>
+  <p:clrMapOvr>
+    <a:masterClrMapping/>
+  </p:clrMapOvr>
+</p:sld>
+</file>
+
+<file path=ppt/slides/slide5.xml><?xml version="1.0" encoding="utf-8"?>
+<p:sld xmlns:a="http://schemas.openxmlformats.org/drawingml/2006/main" xmlns:r="http://schemas.openxmlformats.org/officeDocument/2006/relationships" xmlns:p="http://schemas.openxmlformats.org/presentationml/2006/main">
+  <p:cSld>
+    <p:spTree>
+      <p:nvGrpSpPr>
+        <p:cNvPr id="1" name="">
+          <a:extLst>
+            <a:ext uri="{FF2B5EF4-FFF2-40B4-BE49-F238E27FC236}">
+              <a16:creationId xmlns:a16="http://schemas.microsoft.com/office/drawing/2014/main" id="{5C303E6B-F72A-4E10-EF3B-E5155773D5E0}"/>
+            </a:ext>
+          </a:extLst>
+        </p:cNvPr>
+        <p:cNvGrpSpPr/>
+        <p:nvPr/>
+      </p:nvGrpSpPr>
+      <p:grpSpPr>
+        <a:xfrm>
+          <a:off x="0" y="0"/>
+          <a:ext cx="0" cy="0"/>
+          <a:chOff x="0" y="0"/>
+          <a:chExt cx="0" cy="0"/>
+        </a:xfrm>
+      </p:grpSpPr>
+      <p:pic>
+        <p:nvPicPr>
+          <p:cNvPr id="5" name="Picture 4" descr="A screenshot of a computer&#10;&#10;AI-generated content may be incorrect.">
+            <a:extLst>
+              <a:ext uri="{FF2B5EF4-FFF2-40B4-BE49-F238E27FC236}">
+                <a16:creationId xmlns:a16="http://schemas.microsoft.com/office/drawing/2014/main" id="{29CB7063-1F37-EE75-7059-0B1FB566D3E8}"/>
+              </a:ext>
+            </a:extLst>
+          </p:cNvPr>
+          <p:cNvPicPr>
+            <a:picLocks noChangeAspect="1"/>
+          </p:cNvPicPr>
+          <p:nvPr/>
+        </p:nvPicPr>
+        <p:blipFill>
+          <a:blip r:embed="rId2"/>
+          <a:stretch>
+            <a:fillRect/>
+          </a:stretch>
+        </p:blipFill>
+        <p:spPr>
+          <a:xfrm>
+            <a:off x="1155908" y="817878"/>
+            <a:ext cx="8900008" cy="4819324"/>
+          </a:xfrm>
+          <a:prstGeom prst="rect">
+            <a:avLst/>
+          </a:prstGeom>
+        </p:spPr>
+      </p:pic>
+      <p:graphicFrame>
+        <p:nvGraphicFramePr>
+          <p:cNvPr id="6" name="Table 5">
+            <a:extLst>
+              <a:ext uri="{FF2B5EF4-FFF2-40B4-BE49-F238E27FC236}">
+                <a16:creationId xmlns:a16="http://schemas.microsoft.com/office/drawing/2014/main" id="{2C47082D-CC4D-0414-F470-91E8E57520E7}"/>
+              </a:ext>
+            </a:extLst>
+          </p:cNvPr>
+          <p:cNvGraphicFramePr>
+            <a:graphicFrameLocks noGrp="1"/>
+          </p:cNvGraphicFramePr>
+          <p:nvPr>
+            <p:extLst>
+              <p:ext uri="{D42A27DB-BD31-4B8C-83A1-F6EECF244321}">
+                <p14:modId xmlns:p14="http://schemas.microsoft.com/office/powerpoint/2010/main" val="949335093"/>
+              </p:ext>
+            </p:extLst>
+          </p:nvPr>
+        </p:nvGraphicFramePr>
+        <p:xfrm>
+          <a:off x="911916" y="5908330"/>
+          <a:ext cx="10515599" cy="152400"/>
+        </p:xfrm>
+        <a:graphic>
+          <a:graphicData uri="http://schemas.openxmlformats.org/drawingml/2006/table">
+            <a:tbl>
+              <a:tblPr>
+                <a:tableStyleId>{5C22544A-7EE6-4342-B048-85BDC9FD1C3A}</a:tableStyleId>
+              </a:tblPr>
+              <a:tblGrid>
+                <a:gridCol w="4964287">
+                  <a:extLst>
+                    <a:ext uri="{9D8B030D-6E8A-4147-A177-3AD203B41FA5}">
+                      <a16:colId xmlns:a16="http://schemas.microsoft.com/office/drawing/2014/main" val="2937744267"/>
+                    </a:ext>
+                  </a:extLst>
+                </a:gridCol>
+                <a:gridCol w="896715">
+                  <a:extLst>
+                    <a:ext uri="{9D8B030D-6E8A-4147-A177-3AD203B41FA5}">
+                      <a16:colId xmlns:a16="http://schemas.microsoft.com/office/drawing/2014/main" val="2703411051"/>
+                    </a:ext>
+                  </a:extLst>
+                </a:gridCol>
+                <a:gridCol w="1518406">
+                  <a:extLst>
+                    <a:ext uri="{9D8B030D-6E8A-4147-A177-3AD203B41FA5}">
+                      <a16:colId xmlns:a16="http://schemas.microsoft.com/office/drawing/2014/main" val="1527843438"/>
+                    </a:ext>
+                  </a:extLst>
+                </a:gridCol>
+                <a:gridCol w="2239476">
+                  <a:extLst>
+                    <a:ext uri="{9D8B030D-6E8A-4147-A177-3AD203B41FA5}">
+                      <a16:colId xmlns:a16="http://schemas.microsoft.com/office/drawing/2014/main" val="1713506086"/>
+                    </a:ext>
+                  </a:extLst>
+                </a:gridCol>
+                <a:gridCol w="896715">
+                  <a:extLst>
+                    <a:ext uri="{9D8B030D-6E8A-4147-A177-3AD203B41FA5}">
+                      <a16:colId xmlns:a16="http://schemas.microsoft.com/office/drawing/2014/main" val="1049905033"/>
+                    </a:ext>
+                  </a:extLst>
+                </a:gridCol>
+              </a:tblGrid>
+              <a:tr h="131792">
+                <a:tc>
+                  <a:txBody>
+                    <a:bodyPr/>
+                    <a:lstStyle/>
+                    <a:p>
+                      <a:pPr algn="l" fontAlgn="b">
+                        <a:buNone/>
+                      </a:pPr>
+                      <a:r>
+                        <a:rPr lang="en-CA" sz="1000" u="none" strike="noStrike" dirty="0">
+                          <a:effectLst/>
+                        </a:rPr>
+                        <a:t>Concatenate data and Delete this station</a:t>
+                      </a:r>
+                      <a:endParaRPr lang="en-CA" sz="1000" b="1" i="0" u="none" strike="noStrike" dirty="0">
+                        <a:solidFill>
+                          <a:srgbClr val="000000"/>
+                        </a:solidFill>
+                        <a:effectLst/>
+                        <a:latin typeface="Aptos Narrow" panose="020B0004020202020204" pitchFamily="34" charset="0"/>
+                      </a:endParaRPr>
+                    </a:p>
+                  </a:txBody>
+                  <a:tcPr marL="0" marR="0" marT="0" marB="0" anchor="b"/>
+                </a:tc>
+                <a:tc>
+                  <a:txBody>
+                    <a:bodyPr/>
+                    <a:lstStyle/>
+                    <a:p>
+                      <a:pPr algn="r" fontAlgn="b">
+                        <a:buNone/>
+                      </a:pPr>
+                      <a:r>
+                        <a:rPr lang="en-CA" sz="800" u="none" strike="noStrike">
+                          <a:effectLst/>
+                        </a:rPr>
+                        <a:t>36</a:t>
+                      </a:r>
+                      <a:endParaRPr lang="en-CA" sz="800" b="0" i="0" u="none" strike="noStrike">
+                        <a:solidFill>
+                          <a:srgbClr val="000000"/>
+                        </a:solidFill>
+                        <a:effectLst/>
+                        <a:latin typeface="Aptos Narrow" panose="020B0004020202020204" pitchFamily="34" charset="0"/>
+                      </a:endParaRPr>
+                    </a:p>
+                  </a:txBody>
+                  <a:tcPr marL="0" marR="0" marT="0" marB="0" anchor="b"/>
+                </a:tc>
+                <a:tc>
+                  <a:txBody>
+                    <a:bodyPr/>
+                    <a:lstStyle/>
+                    <a:p>
+                      <a:pPr algn="l" fontAlgn="b">
+                        <a:buNone/>
+                      </a:pPr>
+                      <a:r>
+                        <a:rPr lang="en-CA" sz="800" u="none" strike="noStrike">
+                          <a:effectLst/>
+                        </a:rPr>
+                        <a:t>CRD-WS</a:t>
+                      </a:r>
+                      <a:endParaRPr lang="en-CA" sz="800" b="0" i="0" u="none" strike="noStrike">
+                        <a:solidFill>
+                          <a:srgbClr val="000000"/>
+                        </a:solidFill>
+                        <a:effectLst/>
+                        <a:latin typeface="Aptos Narrow" panose="020B0004020202020204" pitchFamily="34" charset="0"/>
+                      </a:endParaRPr>
+                    </a:p>
+                  </a:txBody>
+                  <a:tcPr marL="0" marR="0" marT="0" marB="0" anchor="b"/>
+                </a:tc>
+                <a:tc>
+                  <a:txBody>
+                    <a:bodyPr/>
+                    <a:lstStyle/>
+                    <a:p>
+                      <a:pPr algn="l" fontAlgn="b">
+                        <a:buNone/>
+                      </a:pPr>
+                      <a:r>
+                        <a:rPr lang="en-CA" sz="800" u="none" strike="noStrike">
+                          <a:effectLst/>
+                        </a:rPr>
+                        <a:t>14g -&gt; FW001</a:t>
+                      </a:r>
+                      <a:endParaRPr lang="en-CA" sz="800" b="1" i="0" u="none" strike="noStrike">
+                        <a:solidFill>
+                          <a:srgbClr val="9C0006"/>
+                        </a:solidFill>
+                        <a:effectLst/>
+                        <a:latin typeface="Aptos Narrow" panose="020B0004020202020204" pitchFamily="34" charset="0"/>
+                      </a:endParaRPr>
+                    </a:p>
+                  </a:txBody>
+                  <a:tcPr marL="0" marR="0" marT="0" marB="0" anchor="b"/>
+                </a:tc>
+                <a:tc>
+                  <a:txBody>
+                    <a:bodyPr/>
+                    <a:lstStyle/>
+                    <a:p>
+                      <a:pPr algn="r" fontAlgn="b">
+                        <a:buNone/>
+                      </a:pPr>
+                      <a:r>
+                        <a:rPr lang="en-CA" sz="800" u="none" strike="noStrike" dirty="0">
+                          <a:effectLst/>
+                        </a:rPr>
+                        <a:t>12627</a:t>
+                      </a:r>
+                      <a:endParaRPr lang="en-CA" sz="800" b="0" i="0" u="none" strike="noStrike" dirty="0">
+                        <a:solidFill>
+                          <a:srgbClr val="000000"/>
+                        </a:solidFill>
+                        <a:effectLst/>
+                        <a:latin typeface="Aptos Narrow" panose="020B0004020202020204" pitchFamily="34" charset="0"/>
+                      </a:endParaRPr>
+                    </a:p>
+                  </a:txBody>
+                  <a:tcPr marL="0" marR="0" marT="0" marB="0" anchor="b"/>
+                </a:tc>
+                <a:extLst>
+                  <a:ext uri="{0D108BD9-81ED-4DB2-BD59-A6C34878D82A}">
+                    <a16:rowId xmlns:a16="http://schemas.microsoft.com/office/drawing/2014/main" val="3768567622"/>
+                  </a:ext>
+                </a:extLst>
+              </a:tr>
+            </a:tbl>
+          </a:graphicData>
+        </a:graphic>
+      </p:graphicFrame>
+      <p:sp>
+        <p:nvSpPr>
+          <p:cNvPr id="7" name="TextBox 6">
+            <a:extLst>
+              <a:ext uri="{FF2B5EF4-FFF2-40B4-BE49-F238E27FC236}">
+                <a16:creationId xmlns:a16="http://schemas.microsoft.com/office/drawing/2014/main" id="{E6B62198-A188-F090-F6F1-1BCDF8D79320}"/>
+              </a:ext>
+            </a:extLst>
+          </p:cNvPr>
+          <p:cNvSpPr txBox="1"/>
+          <p:nvPr/>
+        </p:nvSpPr>
+        <p:spPr>
+          <a:xfrm>
+            <a:off x="834887" y="177418"/>
+            <a:ext cx="1531830" cy="369332"/>
+          </a:xfrm>
+          <a:prstGeom prst="rect">
+            <a:avLst/>
+          </a:prstGeom>
+          <a:noFill/>
+        </p:spPr>
+        <p:txBody>
+          <a:bodyPr wrap="none" rtlCol="0">
+            <a:spAutoFit/>
+          </a:bodyPr>
+          <a:lstStyle/>
+          <a:p>
+            <a:r>
+              <a:rPr lang="en-US" dirty="0"/>
+              <a:t>Looks normal</a:t>
+            </a:r>
+          </a:p>
+        </p:txBody>
+      </p:sp>
+    </p:spTree>
+    <p:extLst>
+      <p:ext uri="{BB962C8B-B14F-4D97-AF65-F5344CB8AC3E}">
+        <p14:creationId xmlns:p14="http://schemas.microsoft.com/office/powerpoint/2010/main" val="3899435642"/>
+      </p:ext>
+    </p:extLst>
+  </p:cSld>
+  <p:clrMapOvr>
+    <a:masterClrMapping/>
+  </p:clrMapOvr>
+</p:sld>
+</file>
+
+<file path=ppt/slides/slide6.xml><?xml version="1.0" encoding="utf-8"?>
+<p:sld xmlns:a="http://schemas.openxmlformats.org/drawingml/2006/main" xmlns:r="http://schemas.openxmlformats.org/officeDocument/2006/relationships" xmlns:p="http://schemas.openxmlformats.org/presentationml/2006/main">
+  <p:cSld>
+    <p:spTree>
+      <p:nvGrpSpPr>
+        <p:cNvPr id="1" name="">
+          <a:extLst>
+            <a:ext uri="{FF2B5EF4-FFF2-40B4-BE49-F238E27FC236}">
+              <a16:creationId xmlns:a16="http://schemas.microsoft.com/office/drawing/2014/main" id="{EB574989-9C1B-2F21-186C-F09FAD219D9C}"/>
+            </a:ext>
+          </a:extLst>
+        </p:cNvPr>
+        <p:cNvGrpSpPr/>
+        <p:nvPr/>
+      </p:nvGrpSpPr>
+      <p:grpSpPr>
+        <a:xfrm>
+          <a:off x="0" y="0"/>
+          <a:ext cx="0" cy="0"/>
+          <a:chOff x="0" y="0"/>
+          <a:chExt cx="0" cy="0"/>
+        </a:xfrm>
+      </p:grpSpPr>
+      <p:pic>
+        <p:nvPicPr>
+          <p:cNvPr id="3" name="Picture 2" descr="A screenshot of a computer&#10;&#10;AI-generated content may be incorrect.">
+            <a:extLst>
+              <a:ext uri="{FF2B5EF4-FFF2-40B4-BE49-F238E27FC236}">
+                <a16:creationId xmlns:a16="http://schemas.microsoft.com/office/drawing/2014/main" id="{B0CAB101-C1FB-334A-5521-2D6E0ADD5D09}"/>
+              </a:ext>
+            </a:extLst>
+          </p:cNvPr>
+          <p:cNvPicPr>
+            <a:picLocks noChangeAspect="1"/>
+          </p:cNvPicPr>
+          <p:nvPr/>
+        </p:nvPicPr>
+        <p:blipFill>
+          <a:blip r:embed="rId2"/>
+          <a:stretch>
+            <a:fillRect/>
+          </a:stretch>
+        </p:blipFill>
+        <p:spPr>
+          <a:xfrm>
+            <a:off x="634724" y="1211884"/>
+            <a:ext cx="9863906" cy="4434232"/>
+          </a:xfrm>
+          <a:prstGeom prst="rect">
+            <a:avLst/>
+          </a:prstGeom>
+        </p:spPr>
+      </p:pic>
+      <p:sp>
+        <p:nvSpPr>
+          <p:cNvPr id="4" name="TextBox 3">
+            <a:extLst>
+              <a:ext uri="{FF2B5EF4-FFF2-40B4-BE49-F238E27FC236}">
+                <a16:creationId xmlns:a16="http://schemas.microsoft.com/office/drawing/2014/main" id="{FBFB507F-885D-27E4-5550-10A01B395740}"/>
+              </a:ext>
+            </a:extLst>
+          </p:cNvPr>
+          <p:cNvSpPr txBox="1"/>
+          <p:nvPr/>
+        </p:nvSpPr>
+        <p:spPr>
+          <a:xfrm>
+            <a:off x="1232452" y="516835"/>
+            <a:ext cx="1986698" cy="369332"/>
+          </a:xfrm>
+          <a:prstGeom prst="rect">
+            <a:avLst/>
+          </a:prstGeom>
+          <a:noFill/>
+        </p:spPr>
+        <p:txBody>
+          <a:bodyPr wrap="none" rtlCol="0">
+            <a:spAutoFit/>
+          </a:bodyPr>
+          <a:lstStyle/>
+          <a:p>
+            <a:r>
+              <a:rPr lang="en-US" dirty="0"/>
+              <a:t>New station insert</a:t>
+            </a:r>
+          </a:p>
+        </p:txBody>
+      </p:sp>
+      <p:pic>
+        <p:nvPicPr>
+          <p:cNvPr id="6" name="Picture 5" descr="A table of numbers with numbers&#10;&#10;AI-generated content may be incorrect.">
+            <a:extLst>
+              <a:ext uri="{FF2B5EF4-FFF2-40B4-BE49-F238E27FC236}">
+                <a16:creationId xmlns:a16="http://schemas.microsoft.com/office/drawing/2014/main" id="{BE6D2C85-CADE-EA77-70A8-013669C229E0}"/>
+              </a:ext>
+            </a:extLst>
+          </p:cNvPr>
+          <p:cNvPicPr>
+            <a:picLocks noChangeAspect="1"/>
+          </p:cNvPicPr>
+          <p:nvPr/>
+        </p:nvPicPr>
+        <p:blipFill>
+          <a:blip r:embed="rId3"/>
+          <a:stretch>
+            <a:fillRect/>
+          </a:stretch>
+        </p:blipFill>
+        <p:spPr>
+          <a:xfrm>
+            <a:off x="6282230" y="701501"/>
+            <a:ext cx="4216400" cy="2171700"/>
+          </a:xfrm>
+          <a:prstGeom prst="rect">
+            <a:avLst/>
+          </a:prstGeom>
+        </p:spPr>
+      </p:pic>
+    </p:spTree>
+    <p:extLst>
+      <p:ext uri="{BB962C8B-B14F-4D97-AF65-F5344CB8AC3E}">
+        <p14:creationId xmlns:p14="http://schemas.microsoft.com/office/powerpoint/2010/main" val="974885355"/>
+      </p:ext>
+    </p:extLst>
+  </p:cSld>
+  <p:clrMapOvr>
+    <a:masterClrMapping/>
+  </p:clrMapOvr>
+</p:sld>
+</file>
+
+<file path=ppt/slides/slide7.xml><?xml version="1.0" encoding="utf-8"?>
+<p:sld xmlns:a="http://schemas.openxmlformats.org/drawingml/2006/main" xmlns:r="http://schemas.openxmlformats.org/officeDocument/2006/relationships" xmlns:p="http://schemas.openxmlformats.org/presentationml/2006/main">
+  <p:cSld>
+    <p:spTree>
+      <p:nvGrpSpPr>
+        <p:cNvPr id="1" name="">
+          <a:extLst>
+            <a:ext uri="{FF2B5EF4-FFF2-40B4-BE49-F238E27FC236}">
+              <a16:creationId xmlns:a16="http://schemas.microsoft.com/office/drawing/2014/main" id="{644354AA-083E-05A1-2F29-A988FE544617}"/>
+            </a:ext>
+          </a:extLst>
+        </p:cNvPr>
+        <p:cNvGrpSpPr/>
+        <p:nvPr/>
+      </p:nvGrpSpPr>
+      <p:grpSpPr>
+        <a:xfrm>
+          <a:off x="0" y="0"/>
+          <a:ext cx="0" cy="0"/>
+          <a:chOff x="0" y="0"/>
+          <a:chExt cx="0" cy="0"/>
+        </a:xfrm>
+      </p:grpSpPr>
+      <p:graphicFrame>
+        <p:nvGraphicFramePr>
+          <p:cNvPr id="2" name="Table 1">
+            <a:extLst>
+              <a:ext uri="{FF2B5EF4-FFF2-40B4-BE49-F238E27FC236}">
+                <a16:creationId xmlns:a16="http://schemas.microsoft.com/office/drawing/2014/main" id="{8C146CC7-E5AB-CCB8-8DDA-0F14813AFD98}"/>
+              </a:ext>
+            </a:extLst>
+          </p:cNvPr>
+          <p:cNvGraphicFramePr>
+            <a:graphicFrameLocks noGrp="1"/>
+          </p:cNvGraphicFramePr>
+          <p:nvPr>
+            <p:extLst>
+              <p:ext uri="{D42A27DB-BD31-4B8C-83A1-F6EECF244321}">
+                <p14:modId xmlns:p14="http://schemas.microsoft.com/office/powerpoint/2010/main" val="1731973259"/>
+              </p:ext>
+            </p:extLst>
+          </p:nvPr>
+        </p:nvGraphicFramePr>
+        <p:xfrm>
+          <a:off x="604935" y="1192861"/>
+          <a:ext cx="10515600" cy="182880"/>
+        </p:xfrm>
+        <a:graphic>
+          <a:graphicData uri="http://schemas.openxmlformats.org/drawingml/2006/table">
+            <a:tbl>
+              <a:tblPr>
+                <a:tableStyleId>{5C22544A-7EE6-4342-B048-85BDC9FD1C3A}</a:tableStyleId>
+              </a:tblPr>
+              <a:tblGrid>
+                <a:gridCol w="5427080">
+                  <a:extLst>
+                    <a:ext uri="{9D8B030D-6E8A-4147-A177-3AD203B41FA5}">
+                      <a16:colId xmlns:a16="http://schemas.microsoft.com/office/drawing/2014/main" val="2961326537"/>
+                    </a:ext>
+                  </a:extLst>
+                </a:gridCol>
+                <a:gridCol w="980311">
+                  <a:extLst>
+                    <a:ext uri="{9D8B030D-6E8A-4147-A177-3AD203B41FA5}">
+                      <a16:colId xmlns:a16="http://schemas.microsoft.com/office/drawing/2014/main" val="632182800"/>
+                    </a:ext>
+                  </a:extLst>
+                </a:gridCol>
+                <a:gridCol w="1659959">
+                  <a:extLst>
+                    <a:ext uri="{9D8B030D-6E8A-4147-A177-3AD203B41FA5}">
+                      <a16:colId xmlns:a16="http://schemas.microsoft.com/office/drawing/2014/main" val="2445740344"/>
+                    </a:ext>
+                  </a:extLst>
+                </a:gridCol>
+                <a:gridCol w="2448250">
+                  <a:extLst>
+                    <a:ext uri="{9D8B030D-6E8A-4147-A177-3AD203B41FA5}">
+                      <a16:colId xmlns:a16="http://schemas.microsoft.com/office/drawing/2014/main" val="3040674239"/>
+                    </a:ext>
+                  </a:extLst>
+                </a:gridCol>
+              </a:tblGrid>
+              <a:tr h="144084">
+                <a:tc>
+                  <a:txBody>
+                    <a:bodyPr/>
+                    <a:lstStyle/>
+                    <a:p>
+                      <a:pPr algn="l" fontAlgn="b">
+                        <a:buNone/>
+                      </a:pPr>
+                      <a:r>
+                        <a:rPr lang="en-CA" sz="1200" u="none" strike="noStrike" dirty="0">
+                          <a:effectLst/>
+                        </a:rPr>
+                        <a:t>Concatenate data and Delete this station</a:t>
+                      </a:r>
+                      <a:endParaRPr lang="en-CA" sz="1200" b="1" i="0" u="none" strike="noStrike" dirty="0">
+                        <a:solidFill>
+                          <a:srgbClr val="000000"/>
+                        </a:solidFill>
+                        <a:effectLst/>
+                        <a:latin typeface="Aptos Narrow" panose="020B0004020202020204" pitchFamily="34" charset="0"/>
+                      </a:endParaRPr>
+                    </a:p>
+                  </a:txBody>
+                  <a:tcPr marL="0" marR="0" marT="0" marB="0" anchor="b"/>
+                </a:tc>
+                <a:tc>
+                  <a:txBody>
+                    <a:bodyPr/>
+                    <a:lstStyle/>
+                    <a:p>
+                      <a:pPr algn="r" fontAlgn="b">
+                        <a:buNone/>
+                      </a:pPr>
+                      <a:r>
+                        <a:rPr lang="en-CA" sz="1200" u="none" strike="noStrike">
+                          <a:effectLst/>
+                        </a:rPr>
+                        <a:t>36</a:t>
+                      </a:r>
+                      <a:endParaRPr lang="en-CA" sz="1200" b="0" i="0" u="none" strike="noStrike">
+                        <a:solidFill>
+                          <a:srgbClr val="000000"/>
+                        </a:solidFill>
+                        <a:effectLst/>
+                        <a:latin typeface="Aptos Narrow" panose="020B0004020202020204" pitchFamily="34" charset="0"/>
+                      </a:endParaRPr>
+                    </a:p>
+                  </a:txBody>
+                  <a:tcPr marL="0" marR="0" marT="0" marB="0" anchor="b"/>
+                </a:tc>
+                <a:tc>
+                  <a:txBody>
+                    <a:bodyPr/>
+                    <a:lstStyle/>
+                    <a:p>
+                      <a:pPr algn="l" fontAlgn="b">
+                        <a:buNone/>
+                      </a:pPr>
+                      <a:r>
+                        <a:rPr lang="en-CA" sz="1200" u="none" strike="noStrike">
+                          <a:effectLst/>
+                        </a:rPr>
+                        <a:t>CRD-WS</a:t>
+                      </a:r>
+                      <a:endParaRPr lang="en-CA" sz="1200" b="0" i="0" u="none" strike="noStrike">
+                        <a:solidFill>
+                          <a:srgbClr val="000000"/>
+                        </a:solidFill>
+                        <a:effectLst/>
+                        <a:latin typeface="Aptos Narrow" panose="020B0004020202020204" pitchFamily="34" charset="0"/>
+                      </a:endParaRPr>
+                    </a:p>
+                  </a:txBody>
+                  <a:tcPr marL="0" marR="0" marT="0" marB="0" anchor="b"/>
+                </a:tc>
+                <a:tc>
+                  <a:txBody>
+                    <a:bodyPr/>
+                    <a:lstStyle/>
+                    <a:p>
+                      <a:pPr algn="l" fontAlgn="b">
+                        <a:buNone/>
+                      </a:pPr>
+                      <a:r>
+                        <a:rPr lang="en-CA" sz="1200" u="none" strike="noStrike" dirty="0">
+                          <a:effectLst/>
+                        </a:rPr>
+                        <a:t>4rw6 -&gt; FW004</a:t>
+                      </a:r>
+                      <a:endParaRPr lang="en-CA" sz="1200" b="1" i="0" u="none" strike="noStrike" dirty="0">
+                        <a:solidFill>
+                          <a:srgbClr val="9C0006"/>
+                        </a:solidFill>
+                        <a:effectLst/>
+                        <a:latin typeface="Aptos Narrow" panose="020B0004020202020204" pitchFamily="34" charset="0"/>
+                      </a:endParaRPr>
+                    </a:p>
+                  </a:txBody>
+                  <a:tcPr marL="0" marR="0" marT="0" marB="0" anchor="b"/>
+                </a:tc>
+                <a:extLst>
+                  <a:ext uri="{0D108BD9-81ED-4DB2-BD59-A6C34878D82A}">
+                    <a16:rowId xmlns:a16="http://schemas.microsoft.com/office/drawing/2014/main" val="776594483"/>
+                  </a:ext>
+                </a:extLst>
+              </a:tr>
+            </a:tbl>
+          </a:graphicData>
+        </a:graphic>
+      </p:graphicFrame>
+      <p:sp>
+        <p:nvSpPr>
+          <p:cNvPr id="5" name="TextBox 4">
+            <a:extLst>
+              <a:ext uri="{FF2B5EF4-FFF2-40B4-BE49-F238E27FC236}">
+                <a16:creationId xmlns:a16="http://schemas.microsoft.com/office/drawing/2014/main" id="{0EB4187E-AF66-378B-4931-EB30DD9532A0}"/>
+              </a:ext>
+            </a:extLst>
+          </p:cNvPr>
+          <p:cNvSpPr txBox="1"/>
+          <p:nvPr/>
+        </p:nvSpPr>
+        <p:spPr>
+          <a:xfrm>
+            <a:off x="429604" y="260631"/>
+            <a:ext cx="6098582" cy="461665"/>
+          </a:xfrm>
+          <a:prstGeom prst="rect">
+            <a:avLst/>
+          </a:prstGeom>
+          <a:noFill/>
+        </p:spPr>
+        <p:txBody>
+          <a:bodyPr wrap="square">
+            <a:spAutoFit/>
+          </a:bodyPr>
+          <a:lstStyle/>
+          <a:p>
+            <a:r>
+              <a:rPr lang="en-CA" sz="1200" b="1" dirty="0">
+                <a:effectLst/>
+                <a:latin typeface="Menlo" panose="020B0609030804020204" pitchFamily="49" charset="0"/>
+              </a:rPr>
+              <a:t> </a:t>
+            </a:r>
+            <a:r>
+              <a:rPr lang="en-CA" sz="1200" b="1" dirty="0" err="1">
+                <a:effectLst/>
+                <a:latin typeface="Menlo" panose="020B0609030804020204" pitchFamily="49" charset="0"/>
+              </a:rPr>
+              <a:t>h.history_id</a:t>
+            </a:r>
+            <a:r>
+              <a:rPr lang="en-CA" sz="1200" b="1" dirty="0">
+                <a:effectLst/>
+                <a:latin typeface="Menlo" panose="020B0609030804020204" pitchFamily="49" charset="0"/>
+              </a:rPr>
+              <a:t> = 14637</a:t>
+            </a:r>
+            <a:br>
+              <a:rPr lang="en-CA" sz="1200" b="1" dirty="0">
+                <a:effectLst/>
+                <a:latin typeface="Menlo" panose="020B0609030804020204" pitchFamily="49" charset="0"/>
+              </a:rPr>
+            </a:br>
+            <a:r>
+              <a:rPr lang="en-CA" sz="1200" b="1" dirty="0">
+                <a:effectLst/>
+                <a:latin typeface="Menlo" panose="020B0609030804020204" pitchFamily="49" charset="0"/>
+              </a:rPr>
+              <a:t>and </a:t>
+            </a:r>
+            <a:r>
+              <a:rPr lang="en-CA" sz="1200" b="1" dirty="0" err="1">
+                <a:effectLst/>
+                <a:latin typeface="Menlo" panose="020B0609030804020204" pitchFamily="49" charset="0"/>
+              </a:rPr>
+              <a:t>v.vars_id</a:t>
+            </a:r>
+            <a:r>
+              <a:rPr lang="en-CA" sz="1200" b="1" dirty="0">
+                <a:effectLst/>
+                <a:latin typeface="Menlo" panose="020B0609030804020204" pitchFamily="49" charset="0"/>
+              </a:rPr>
+              <a:t> = 738</a:t>
+            </a:r>
+            <a:endParaRPr lang="en-US" sz="1200" b="1" dirty="0"/>
+          </a:p>
+        </p:txBody>
+      </p:sp>
+      <p:pic>
+        <p:nvPicPr>
+          <p:cNvPr id="7" name="Picture 6" descr="A screen shot of a computer&#10;&#10;AI-generated content may be incorrect.">
+            <a:extLst>
+              <a:ext uri="{FF2B5EF4-FFF2-40B4-BE49-F238E27FC236}">
+                <a16:creationId xmlns:a16="http://schemas.microsoft.com/office/drawing/2014/main" id="{DC1AA045-8144-16A6-E280-CFA02F77E211}"/>
+              </a:ext>
+            </a:extLst>
+          </p:cNvPr>
+          <p:cNvPicPr>
+            <a:picLocks noChangeAspect="1"/>
+          </p:cNvPicPr>
+          <p:nvPr/>
+        </p:nvPicPr>
+        <p:blipFill>
+          <a:blip r:embed="rId2"/>
+          <a:stretch>
+            <a:fillRect/>
+          </a:stretch>
+        </p:blipFill>
+        <p:spPr>
+          <a:xfrm>
+            <a:off x="792405" y="2280920"/>
+            <a:ext cx="8720154" cy="2985278"/>
+          </a:xfrm>
+          <a:prstGeom prst="rect">
+            <a:avLst/>
+          </a:prstGeom>
+        </p:spPr>
+      </p:pic>
+    </p:spTree>
+    <p:extLst>
+      <p:ext uri="{BB962C8B-B14F-4D97-AF65-F5344CB8AC3E}">
+        <p14:creationId xmlns:p14="http://schemas.microsoft.com/office/powerpoint/2010/main" val="598077228"/>
+      </p:ext>
+    </p:extLst>
+  </p:cSld>
+  <p:clrMapOvr>
+    <a:masterClrMapping/>
+  </p:clrMapOvr>
+</p:sld>
+</file>
+
+<file path=ppt/slides/slide8.xml><?xml version="1.0" encoding="utf-8"?>
+<p:sld xmlns:a="http://schemas.openxmlformats.org/drawingml/2006/main" xmlns:r="http://schemas.openxmlformats.org/officeDocument/2006/relationships" xmlns:p="http://schemas.openxmlformats.org/presentationml/2006/main">
+  <p:cSld>
+    <p:spTree>
+      <p:nvGrpSpPr>
+        <p:cNvPr id="1" name="">
+          <a:extLst>
+            <a:ext uri="{FF2B5EF4-FFF2-40B4-BE49-F238E27FC236}">
+              <a16:creationId xmlns:a16="http://schemas.microsoft.com/office/drawing/2014/main" id="{D3568003-3556-6310-4731-EED1C35A4CE4}"/>
+            </a:ext>
+          </a:extLst>
+        </p:cNvPr>
+        <p:cNvGrpSpPr/>
+        <p:nvPr/>
+      </p:nvGrpSpPr>
+      <p:grpSpPr>
+        <a:xfrm>
+          <a:off x="0" y="0"/>
+          <a:ext cx="0" cy="0"/>
+          <a:chOff x="0" y="0"/>
+          <a:chExt cx="0" cy="0"/>
+        </a:xfrm>
+      </p:grpSpPr>
+      <p:graphicFrame>
+        <p:nvGraphicFramePr>
+          <p:cNvPr id="5" name="Table 4">
+            <a:extLst>
+              <a:ext uri="{FF2B5EF4-FFF2-40B4-BE49-F238E27FC236}">
+                <a16:creationId xmlns:a16="http://schemas.microsoft.com/office/drawing/2014/main" id="{BDFC02CB-2578-96D4-2DB7-BA573CCCDC21}"/>
+              </a:ext>
+            </a:extLst>
+          </p:cNvPr>
+          <p:cNvGraphicFramePr>
+            <a:graphicFrameLocks noGrp="1"/>
+          </p:cNvGraphicFramePr>
+          <p:nvPr>
+            <p:extLst>
+              <p:ext uri="{D42A27DB-BD31-4B8C-83A1-F6EECF244321}">
+                <p14:modId xmlns:p14="http://schemas.microsoft.com/office/powerpoint/2010/main" val="376034917"/>
+              </p:ext>
+            </p:extLst>
+          </p:nvPr>
+        </p:nvGraphicFramePr>
+        <p:xfrm>
+          <a:off x="492968" y="2107261"/>
+          <a:ext cx="10515600" cy="182880"/>
+        </p:xfrm>
+        <a:graphic>
+          <a:graphicData uri="http://schemas.openxmlformats.org/drawingml/2006/table">
+            <a:tbl>
+              <a:tblPr>
+                <a:tableStyleId>{5C22544A-7EE6-4342-B048-85BDC9FD1C3A}</a:tableStyleId>
+              </a:tblPr>
+              <a:tblGrid>
+                <a:gridCol w="5427080">
+                  <a:extLst>
+                    <a:ext uri="{9D8B030D-6E8A-4147-A177-3AD203B41FA5}">
+                      <a16:colId xmlns:a16="http://schemas.microsoft.com/office/drawing/2014/main" val="4004557804"/>
+                    </a:ext>
+                  </a:extLst>
+                </a:gridCol>
+                <a:gridCol w="980311">
+                  <a:extLst>
+                    <a:ext uri="{9D8B030D-6E8A-4147-A177-3AD203B41FA5}">
+                      <a16:colId xmlns:a16="http://schemas.microsoft.com/office/drawing/2014/main" val="1848862857"/>
+                    </a:ext>
+                  </a:extLst>
+                </a:gridCol>
+                <a:gridCol w="1659959">
+                  <a:extLst>
+                    <a:ext uri="{9D8B030D-6E8A-4147-A177-3AD203B41FA5}">
+                      <a16:colId xmlns:a16="http://schemas.microsoft.com/office/drawing/2014/main" val="2932160683"/>
+                    </a:ext>
+                  </a:extLst>
+                </a:gridCol>
+                <a:gridCol w="2448250">
+                  <a:extLst>
+                    <a:ext uri="{9D8B030D-6E8A-4147-A177-3AD203B41FA5}">
+                      <a16:colId xmlns:a16="http://schemas.microsoft.com/office/drawing/2014/main" val="2520739993"/>
+                    </a:ext>
+                  </a:extLst>
+                </a:gridCol>
+              </a:tblGrid>
+              <a:tr h="144084">
+                <a:tc>
+                  <a:txBody>
+                    <a:bodyPr/>
+                    <a:lstStyle/>
+                    <a:p>
+                      <a:pPr algn="l" fontAlgn="b">
+                        <a:buNone/>
+                      </a:pPr>
+                      <a:r>
+                        <a:rPr lang="en-CA" sz="1200" u="none" strike="noStrike" dirty="0">
+                          <a:effectLst/>
+                        </a:rPr>
+                        <a:t>Concatenate data and Delete this station</a:t>
+                      </a:r>
+                      <a:endParaRPr lang="en-CA" sz="1200" b="1" i="0" u="none" strike="noStrike" dirty="0">
+                        <a:solidFill>
+                          <a:srgbClr val="000000"/>
+                        </a:solidFill>
+                        <a:effectLst/>
+                        <a:latin typeface="Aptos Narrow" panose="020B0004020202020204" pitchFamily="34" charset="0"/>
+                      </a:endParaRPr>
+                    </a:p>
+                  </a:txBody>
+                  <a:tcPr marL="0" marR="0" marT="0" marB="0" anchor="b"/>
+                </a:tc>
+                <a:tc>
+                  <a:txBody>
+                    <a:bodyPr/>
+                    <a:lstStyle/>
+                    <a:p>
+                      <a:pPr algn="r" fontAlgn="b">
+                        <a:buNone/>
+                      </a:pPr>
+                      <a:r>
+                        <a:rPr lang="en-CA" sz="1200" u="none" strike="noStrike">
+                          <a:effectLst/>
+                        </a:rPr>
+                        <a:t>36</a:t>
+                      </a:r>
+                      <a:endParaRPr lang="en-CA" sz="1200" b="0" i="0" u="none" strike="noStrike">
+                        <a:solidFill>
+                          <a:srgbClr val="000000"/>
+                        </a:solidFill>
+                        <a:effectLst/>
+                        <a:latin typeface="Aptos Narrow" panose="020B0004020202020204" pitchFamily="34" charset="0"/>
+                      </a:endParaRPr>
+                    </a:p>
+                  </a:txBody>
+                  <a:tcPr marL="0" marR="0" marT="0" marB="0" anchor="b"/>
+                </a:tc>
+                <a:tc>
+                  <a:txBody>
+                    <a:bodyPr/>
+                    <a:lstStyle/>
+                    <a:p>
+                      <a:pPr algn="l" fontAlgn="b">
+                        <a:buNone/>
+                      </a:pPr>
+                      <a:r>
+                        <a:rPr lang="en-CA" sz="1200" u="none" strike="noStrike">
+                          <a:effectLst/>
+                        </a:rPr>
+                        <a:t>CRD-WS</a:t>
+                      </a:r>
+                      <a:endParaRPr lang="en-CA" sz="1200" b="0" i="0" u="none" strike="noStrike">
+                        <a:solidFill>
+                          <a:srgbClr val="000000"/>
+                        </a:solidFill>
+                        <a:effectLst/>
+                        <a:latin typeface="Aptos Narrow" panose="020B0004020202020204" pitchFamily="34" charset="0"/>
+                      </a:endParaRPr>
+                    </a:p>
+                  </a:txBody>
+                  <a:tcPr marL="0" marR="0" marT="0" marB="0" anchor="b"/>
+                </a:tc>
+                <a:tc>
+                  <a:txBody>
+                    <a:bodyPr/>
+                    <a:lstStyle/>
+                    <a:p>
+                      <a:pPr algn="l" fontAlgn="b">
+                        <a:buNone/>
+                      </a:pPr>
+                      <a:r>
+                        <a:rPr lang="en-CA" sz="1200" u="none" strike="noStrike" dirty="0" err="1">
+                          <a:effectLst/>
+                        </a:rPr>
+                        <a:t>martins_gulch</a:t>
+                      </a:r>
+                      <a:r>
+                        <a:rPr lang="en-CA" sz="1200" u="none" strike="noStrike" dirty="0">
+                          <a:effectLst/>
+                        </a:rPr>
+                        <a:t> -&gt; FW007</a:t>
+                      </a:r>
+                      <a:endParaRPr lang="en-CA" sz="1200" b="1" i="0" u="none" strike="noStrike" dirty="0">
+                        <a:solidFill>
+                          <a:srgbClr val="9C0006"/>
+                        </a:solidFill>
+                        <a:effectLst/>
+                        <a:latin typeface="Aptos Narrow" panose="020B0004020202020204" pitchFamily="34" charset="0"/>
+                      </a:endParaRPr>
+                    </a:p>
+                  </a:txBody>
+                  <a:tcPr marL="0" marR="0" marT="0" marB="0" anchor="b"/>
+                </a:tc>
+                <a:extLst>
+                  <a:ext uri="{0D108BD9-81ED-4DB2-BD59-A6C34878D82A}">
+                    <a16:rowId xmlns:a16="http://schemas.microsoft.com/office/drawing/2014/main" val="3722966363"/>
+                  </a:ext>
+                </a:extLst>
+              </a:tr>
+            </a:tbl>
+          </a:graphicData>
+        </a:graphic>
+      </p:graphicFrame>
+      <p:graphicFrame>
+        <p:nvGraphicFramePr>
+          <p:cNvPr id="6" name="Table 5">
+            <a:extLst>
+              <a:ext uri="{FF2B5EF4-FFF2-40B4-BE49-F238E27FC236}">
+                <a16:creationId xmlns:a16="http://schemas.microsoft.com/office/drawing/2014/main" id="{D84C7E19-2A14-65B6-59B5-B489384EAC51}"/>
+              </a:ext>
+            </a:extLst>
+          </p:cNvPr>
+          <p:cNvGraphicFramePr>
+            <a:graphicFrameLocks noGrp="1"/>
+          </p:cNvGraphicFramePr>
+          <p:nvPr>
+            <p:extLst>
+              <p:ext uri="{D42A27DB-BD31-4B8C-83A1-F6EECF244321}">
+                <p14:modId xmlns:p14="http://schemas.microsoft.com/office/powerpoint/2010/main" val="1979962696"/>
+              </p:ext>
+            </p:extLst>
+          </p:nvPr>
+        </p:nvGraphicFramePr>
+        <p:xfrm>
+          <a:off x="578498" y="814112"/>
+          <a:ext cx="9769151" cy="563880"/>
+        </p:xfrm>
+        <a:graphic>
+          <a:graphicData uri="http://schemas.openxmlformats.org/drawingml/2006/table">
+            <a:tbl>
+              <a:tblPr/>
+              <a:tblGrid>
+                <a:gridCol w="641973">
+                  <a:extLst>
+                    <a:ext uri="{9D8B030D-6E8A-4147-A177-3AD203B41FA5}">
+                      <a16:colId xmlns:a16="http://schemas.microsoft.com/office/drawing/2014/main" val="1168855309"/>
+                    </a:ext>
+                  </a:extLst>
+                </a:gridCol>
+                <a:gridCol w="474502">
+                  <a:extLst>
+                    <a:ext uri="{9D8B030D-6E8A-4147-A177-3AD203B41FA5}">
+                      <a16:colId xmlns:a16="http://schemas.microsoft.com/office/drawing/2014/main" val="267088214"/>
+                    </a:ext>
+                  </a:extLst>
+                </a:gridCol>
+                <a:gridCol w="2079433">
+                  <a:extLst>
+                    <a:ext uri="{9D8B030D-6E8A-4147-A177-3AD203B41FA5}">
+                      <a16:colId xmlns:a16="http://schemas.microsoft.com/office/drawing/2014/main" val="845473876"/>
+                    </a:ext>
+                  </a:extLst>
+                </a:gridCol>
+                <a:gridCol w="3209864">
+                  <a:extLst>
+                    <a:ext uri="{9D8B030D-6E8A-4147-A177-3AD203B41FA5}">
+                      <a16:colId xmlns:a16="http://schemas.microsoft.com/office/drawing/2014/main" val="2371770588"/>
+                    </a:ext>
+                  </a:extLst>
+                </a:gridCol>
+                <a:gridCol w="669884">
+                  <a:extLst>
+                    <a:ext uri="{9D8B030D-6E8A-4147-A177-3AD203B41FA5}">
+                      <a16:colId xmlns:a16="http://schemas.microsoft.com/office/drawing/2014/main" val="2268830330"/>
+                    </a:ext>
+                  </a:extLst>
+                </a:gridCol>
+                <a:gridCol w="460546">
+                  <a:extLst>
+                    <a:ext uri="{9D8B030D-6E8A-4147-A177-3AD203B41FA5}">
+                      <a16:colId xmlns:a16="http://schemas.microsoft.com/office/drawing/2014/main" val="3999397830"/>
+                    </a:ext>
+                  </a:extLst>
+                </a:gridCol>
+                <a:gridCol w="823400">
+                  <a:extLst>
+                    <a:ext uri="{9D8B030D-6E8A-4147-A177-3AD203B41FA5}">
+                      <a16:colId xmlns:a16="http://schemas.microsoft.com/office/drawing/2014/main" val="3037675657"/>
+                    </a:ext>
+                  </a:extLst>
+                </a:gridCol>
+                <a:gridCol w="586149">
+                  <a:extLst>
+                    <a:ext uri="{9D8B030D-6E8A-4147-A177-3AD203B41FA5}">
+                      <a16:colId xmlns:a16="http://schemas.microsoft.com/office/drawing/2014/main" val="3142363978"/>
+                    </a:ext>
+                  </a:extLst>
+                </a:gridCol>
+                <a:gridCol w="823400">
+                  <a:extLst>
+                    <a:ext uri="{9D8B030D-6E8A-4147-A177-3AD203B41FA5}">
+                      <a16:colId xmlns:a16="http://schemas.microsoft.com/office/drawing/2014/main" val="1807903972"/>
+                    </a:ext>
+                  </a:extLst>
+                </a:gridCol>
+              </a:tblGrid>
+              <a:tr h="104775">
+                <a:tc>
+                  <a:txBody>
+                    <a:bodyPr/>
+                    <a:lstStyle/>
+                    <a:p>
+                      <a:pPr>
+                        <a:buNone/>
+                      </a:pPr>
+                      <a:r>
+                        <a:rPr lang="en-CA" sz="1600" b="1">
+                          <a:solidFill>
+                            <a:srgbClr val="000000"/>
+                          </a:solidFill>
+                          <a:effectLst/>
+                          <a:latin typeface="Helvetica Neue" panose="02000503000000020004" pitchFamily="2" charset="0"/>
+                        </a:rPr>
+                        <a:t>14639</a:t>
+                      </a:r>
+                      <a:endParaRPr lang="en-CA" sz="1600">
+                        <a:effectLst/>
+                      </a:endParaRPr>
+                    </a:p>
+                  </a:txBody>
+                  <a:tcPr marL="38100" marR="38100" marT="38100" marB="38100">
+                    <a:lnL w="9525" cap="flat" cmpd="sng" algn="ctr">
+                      <a:solidFill>
+                        <a:srgbClr val="000000"/>
+                      </a:solidFill>
+                      <a:prstDash val="solid"/>
+                      <a:round/>
+                      <a:headEnd type="none" w="med" len="med"/>
+                      <a:tailEnd type="none" w="med" len="med"/>
+                    </a:lnL>
+                    <a:lnR w="9525" cap="flat" cmpd="sng" algn="ctr">
+                      <a:solidFill>
+                        <a:srgbClr val="000000"/>
+                      </a:solidFill>
+                      <a:prstDash val="solid"/>
+                      <a:round/>
+                      <a:headEnd type="none" w="med" len="med"/>
+                      <a:tailEnd type="none" w="med" len="med"/>
+                    </a:lnR>
+                    <a:lnT w="9525" cap="flat" cmpd="sng" algn="ctr">
+                      <a:solidFill>
+                        <a:srgbClr val="000000"/>
+                      </a:solidFill>
+                      <a:prstDash val="solid"/>
+                      <a:round/>
+                      <a:headEnd type="none" w="med" len="med"/>
+                      <a:tailEnd type="none" w="med" len="med"/>
+                    </a:lnT>
+                    <a:lnB w="9525" cap="flat" cmpd="sng" algn="ctr">
+                      <a:solidFill>
+                        <a:srgbClr val="000000"/>
+                      </a:solidFill>
+                      <a:prstDash val="solid"/>
+                      <a:round/>
+                      <a:headEnd type="none" w="med" len="med"/>
+                      <a:tailEnd type="none" w="med" len="med"/>
+                    </a:lnB>
+                    <a:solidFill>
+                      <a:srgbClr val="D4D4D4"/>
+                    </a:solidFill>
+                  </a:tcPr>
+                </a:tc>
+                <a:tc>
+                  <a:txBody>
+                    <a:bodyPr/>
+                    <a:lstStyle/>
+                    <a:p>
+                      <a:pPr>
+                        <a:buNone/>
+                      </a:pPr>
+                      <a:r>
+                        <a:rPr lang="en-CA" sz="1600">
+                          <a:solidFill>
+                            <a:srgbClr val="000000"/>
+                          </a:solidFill>
+                          <a:effectLst/>
+                          <a:latin typeface="Helvetica Neue" panose="02000503000000020004" pitchFamily="2" charset="0"/>
+                        </a:rPr>
+                        <a:t>738</a:t>
+                      </a:r>
+                      <a:endParaRPr lang="en-CA" sz="1600">
+                        <a:effectLst/>
+                      </a:endParaRPr>
+                    </a:p>
+                  </a:txBody>
+                  <a:tcPr marL="38100" marR="38100" marT="38100" marB="38100">
+                    <a:lnL w="9525" cap="flat" cmpd="sng" algn="ctr">
+                      <a:solidFill>
+                        <a:srgbClr val="000000"/>
+                      </a:solidFill>
+                      <a:prstDash val="solid"/>
+                      <a:round/>
+                      <a:headEnd type="none" w="med" len="med"/>
+                      <a:tailEnd type="none" w="med" len="med"/>
+                    </a:lnL>
+                    <a:lnR w="9525" cap="flat" cmpd="sng" algn="ctr">
+                      <a:solidFill>
+                        <a:srgbClr val="000000"/>
+                      </a:solidFill>
+                      <a:prstDash val="solid"/>
+                      <a:round/>
+                      <a:headEnd type="none" w="med" len="med"/>
+                      <a:tailEnd type="none" w="med" len="med"/>
+                    </a:lnR>
+                    <a:lnT w="9525" cap="flat" cmpd="sng" algn="ctr">
+                      <a:solidFill>
+                        <a:srgbClr val="000000"/>
+                      </a:solidFill>
+                      <a:prstDash val="solid"/>
+                      <a:round/>
+                      <a:headEnd type="none" w="med" len="med"/>
+                      <a:tailEnd type="none" w="med" len="med"/>
+                    </a:lnT>
+                    <a:lnB w="9525" cap="flat" cmpd="sng" algn="ctr">
+                      <a:solidFill>
+                        <a:srgbClr val="000000"/>
+                      </a:solidFill>
+                      <a:prstDash val="solid"/>
+                      <a:round/>
+                      <a:headEnd type="none" w="med" len="med"/>
+                      <a:tailEnd type="none" w="med" len="med"/>
+                    </a:lnB>
+                    <a:noFill/>
+                  </a:tcPr>
+                </a:tc>
+                <a:tc>
+                  <a:txBody>
+                    <a:bodyPr/>
+                    <a:lstStyle/>
+                    <a:p>
+                      <a:pPr>
+                        <a:buNone/>
+                      </a:pPr>
+                      <a:r>
+                        <a:rPr lang="en-CA" sz="1600">
+                          <a:solidFill>
+                            <a:srgbClr val="000000"/>
+                          </a:solidFill>
+                          <a:effectLst/>
+                          <a:latin typeface="Helvetica Neue" panose="02000503000000020004" pitchFamily="2" charset="0"/>
+                        </a:rPr>
+                        <a:t>Martin's Gulch</a:t>
+                      </a:r>
+                      <a:endParaRPr lang="en-CA" sz="1600">
+                        <a:effectLst/>
+                      </a:endParaRPr>
+                    </a:p>
+                  </a:txBody>
+                  <a:tcPr marL="38100" marR="38100" marT="38100" marB="38100">
+                    <a:lnL w="9525" cap="flat" cmpd="sng" algn="ctr">
+                      <a:solidFill>
+                        <a:srgbClr val="000000"/>
+                      </a:solidFill>
+                      <a:prstDash val="solid"/>
+                      <a:round/>
+                      <a:headEnd type="none" w="med" len="med"/>
+                      <a:tailEnd type="none" w="med" len="med"/>
+                    </a:lnL>
+                    <a:lnR w="9525" cap="flat" cmpd="sng" algn="ctr">
+                      <a:solidFill>
+                        <a:srgbClr val="000000"/>
+                      </a:solidFill>
+                      <a:prstDash val="solid"/>
+                      <a:round/>
+                      <a:headEnd type="none" w="med" len="med"/>
+                      <a:tailEnd type="none" w="med" len="med"/>
+                    </a:lnR>
+                    <a:lnT w="9525" cap="flat" cmpd="sng" algn="ctr">
+                      <a:solidFill>
+                        <a:srgbClr val="000000"/>
+                      </a:solidFill>
+                      <a:prstDash val="solid"/>
+                      <a:round/>
+                      <a:headEnd type="none" w="med" len="med"/>
+                      <a:tailEnd type="none" w="med" len="med"/>
+                    </a:lnT>
+                    <a:lnB w="9525" cap="flat" cmpd="sng" algn="ctr">
+                      <a:solidFill>
+                        <a:srgbClr val="000000"/>
+                      </a:solidFill>
+                      <a:prstDash val="solid"/>
+                      <a:round/>
+                      <a:headEnd type="none" w="med" len="med"/>
+                      <a:tailEnd type="none" w="med" len="med"/>
+                    </a:lnB>
+                    <a:noFill/>
+                  </a:tcPr>
+                </a:tc>
+                <a:tc>
+                  <a:txBody>
+                    <a:bodyPr/>
+                    <a:lstStyle/>
+                    <a:p>
+                      <a:pPr>
+                        <a:buNone/>
+                      </a:pPr>
+                      <a:r>
+                        <a:rPr lang="en-CA" sz="1600">
+                          <a:solidFill>
+                            <a:srgbClr val="000000"/>
+                          </a:solidFill>
+                          <a:effectLst/>
+                          <a:latin typeface="Helvetica Neue" panose="02000503000000020004" pitchFamily="2" charset="0"/>
+                        </a:rPr>
+                        <a:t>Prec_1</a:t>
+                      </a:r>
+                      <a:endParaRPr lang="en-CA" sz="1600">
+                        <a:effectLst/>
+                      </a:endParaRPr>
+                    </a:p>
+                  </a:txBody>
+                  <a:tcPr marL="38100" marR="38100" marT="38100" marB="38100">
+                    <a:lnL w="9525" cap="flat" cmpd="sng" algn="ctr">
+                      <a:solidFill>
+                        <a:srgbClr val="000000"/>
+                      </a:solidFill>
+                      <a:prstDash val="solid"/>
+                      <a:round/>
+                      <a:headEnd type="none" w="med" len="med"/>
+                      <a:tailEnd type="none" w="med" len="med"/>
+                    </a:lnL>
+                    <a:lnR w="9525" cap="flat" cmpd="sng" algn="ctr">
+                      <a:solidFill>
+                        <a:srgbClr val="000000"/>
+                      </a:solidFill>
+                      <a:prstDash val="solid"/>
+                      <a:round/>
+                      <a:headEnd type="none" w="med" len="med"/>
+                      <a:tailEnd type="none" w="med" len="med"/>
+                    </a:lnR>
+                    <a:lnT w="9525" cap="flat" cmpd="sng" algn="ctr">
+                      <a:solidFill>
+                        <a:srgbClr val="000000"/>
+                      </a:solidFill>
+                      <a:prstDash val="solid"/>
+                      <a:round/>
+                      <a:headEnd type="none" w="med" len="med"/>
+                      <a:tailEnd type="none" w="med" len="med"/>
+                    </a:lnT>
+                    <a:lnB w="9525" cap="flat" cmpd="sng" algn="ctr">
+                      <a:solidFill>
+                        <a:srgbClr val="000000"/>
+                      </a:solidFill>
+                      <a:prstDash val="solid"/>
+                      <a:round/>
+                      <a:headEnd type="none" w="med" len="med"/>
+                      <a:tailEnd type="none" w="med" len="med"/>
+                    </a:lnB>
+                    <a:noFill/>
+                  </a:tcPr>
+                </a:tc>
+                <a:tc>
+                  <a:txBody>
+                    <a:bodyPr/>
+                    <a:lstStyle/>
+                    <a:p>
+                      <a:pPr>
+                        <a:buNone/>
+                      </a:pPr>
+                      <a:r>
+                        <a:rPr lang="en-CA" sz="1600">
+                          <a:solidFill>
+                            <a:srgbClr val="000000"/>
+                          </a:solidFill>
+                          <a:effectLst/>
+                          <a:latin typeface="Helvetica Neue" panose="02000503000000020004" pitchFamily="2" charset="0"/>
+                        </a:rPr>
+                        <a:t>97144</a:t>
+                      </a:r>
+                      <a:endParaRPr lang="en-CA" sz="1600">
+                        <a:effectLst/>
+                      </a:endParaRPr>
+                    </a:p>
+                  </a:txBody>
+                  <a:tcPr marL="38100" marR="38100" marT="38100" marB="38100">
+                    <a:lnL w="9525" cap="flat" cmpd="sng" algn="ctr">
+                      <a:solidFill>
+                        <a:srgbClr val="000000"/>
+                      </a:solidFill>
+                      <a:prstDash val="solid"/>
+                      <a:round/>
+                      <a:headEnd type="none" w="med" len="med"/>
+                      <a:tailEnd type="none" w="med" len="med"/>
+                    </a:lnL>
+                    <a:lnR w="9525" cap="flat" cmpd="sng" algn="ctr">
+                      <a:solidFill>
+                        <a:srgbClr val="000000"/>
+                      </a:solidFill>
+                      <a:prstDash val="solid"/>
+                      <a:round/>
+                      <a:headEnd type="none" w="med" len="med"/>
+                      <a:tailEnd type="none" w="med" len="med"/>
+                    </a:lnR>
+                    <a:lnT w="9525" cap="flat" cmpd="sng" algn="ctr">
+                      <a:solidFill>
+                        <a:srgbClr val="000000"/>
+                      </a:solidFill>
+                      <a:prstDash val="solid"/>
+                      <a:round/>
+                      <a:headEnd type="none" w="med" len="med"/>
+                      <a:tailEnd type="none" w="med" len="med"/>
+                    </a:lnT>
+                    <a:lnB w="9525" cap="flat" cmpd="sng" algn="ctr">
+                      <a:solidFill>
+                        <a:srgbClr val="000000"/>
+                      </a:solidFill>
+                      <a:prstDash val="solid"/>
+                      <a:round/>
+                      <a:headEnd type="none" w="med" len="med"/>
+                      <a:tailEnd type="none" w="med" len="med"/>
+                    </a:lnB>
+                    <a:noFill/>
+                  </a:tcPr>
+                </a:tc>
+                <a:tc>
+                  <a:txBody>
+                    <a:bodyPr/>
+                    <a:lstStyle/>
+                    <a:p>
+                      <a:pPr>
+                        <a:buNone/>
+                      </a:pPr>
+                      <a:r>
+                        <a:rPr lang="en-CA" sz="1600">
+                          <a:solidFill>
+                            <a:srgbClr val="000000"/>
+                          </a:solidFill>
+                          <a:effectLst/>
+                          <a:latin typeface="Helvetica Neue" panose="02000503000000020004" pitchFamily="2" charset="0"/>
+                        </a:rPr>
+                        <a:t>43851</a:t>
+                      </a:r>
+                      <a:endParaRPr lang="en-CA" sz="1600">
+                        <a:effectLst/>
+                      </a:endParaRPr>
+                    </a:p>
+                  </a:txBody>
+                  <a:tcPr marL="38100" marR="38100" marT="38100" marB="38100">
+                    <a:lnL w="9525" cap="flat" cmpd="sng" algn="ctr">
+                      <a:solidFill>
+                        <a:srgbClr val="000000"/>
+                      </a:solidFill>
+                      <a:prstDash val="solid"/>
+                      <a:round/>
+                      <a:headEnd type="none" w="med" len="med"/>
+                      <a:tailEnd type="none" w="med" len="med"/>
+                    </a:lnL>
+                    <a:lnR w="9525" cap="flat" cmpd="sng" algn="ctr">
+                      <a:solidFill>
+                        <a:srgbClr val="000000"/>
+                      </a:solidFill>
+                      <a:prstDash val="solid"/>
+                      <a:round/>
+                      <a:headEnd type="none" w="med" len="med"/>
+                      <a:tailEnd type="none" w="med" len="med"/>
+                    </a:lnR>
+                    <a:lnT w="9525" cap="flat" cmpd="sng" algn="ctr">
+                      <a:solidFill>
+                        <a:srgbClr val="000000"/>
+                      </a:solidFill>
+                      <a:prstDash val="solid"/>
+                      <a:round/>
+                      <a:headEnd type="none" w="med" len="med"/>
+                      <a:tailEnd type="none" w="med" len="med"/>
+                    </a:lnT>
+                    <a:lnB w="9525" cap="flat" cmpd="sng" algn="ctr">
+                      <a:solidFill>
+                        <a:srgbClr val="000000"/>
+                      </a:solidFill>
+                      <a:prstDash val="solid"/>
+                      <a:round/>
+                      <a:headEnd type="none" w="med" len="med"/>
+                      <a:tailEnd type="none" w="med" len="med"/>
+                    </a:lnB>
+                    <a:noFill/>
+                  </a:tcPr>
+                </a:tc>
+                <a:tc>
+                  <a:txBody>
+                    <a:bodyPr/>
+                    <a:lstStyle/>
+                    <a:p>
+                      <a:pPr>
+                        <a:buNone/>
+                      </a:pPr>
+                      <a:r>
+                        <a:rPr lang="en-CA" sz="1600">
+                          <a:solidFill>
+                            <a:srgbClr val="000000"/>
+                          </a:solidFill>
+                          <a:effectLst/>
+                          <a:latin typeface="Helvetica Neue" panose="02000503000000020004" pitchFamily="2" charset="0"/>
+                        </a:rPr>
+                        <a:t>0.0108</a:t>
+                      </a:r>
+                      <a:endParaRPr lang="en-CA" sz="1600">
+                        <a:effectLst/>
+                      </a:endParaRPr>
+                    </a:p>
+                  </a:txBody>
+                  <a:tcPr marL="38100" marR="38100" marT="38100" marB="38100">
+                    <a:lnL w="9525" cap="flat" cmpd="sng" algn="ctr">
+                      <a:solidFill>
+                        <a:srgbClr val="000000"/>
+                      </a:solidFill>
+                      <a:prstDash val="solid"/>
+                      <a:round/>
+                      <a:headEnd type="none" w="med" len="med"/>
+                      <a:tailEnd type="none" w="med" len="med"/>
+                    </a:lnL>
+                    <a:lnR w="9525" cap="flat" cmpd="sng" algn="ctr">
+                      <a:solidFill>
+                        <a:srgbClr val="000000"/>
+                      </a:solidFill>
+                      <a:prstDash val="solid"/>
+                      <a:round/>
+                      <a:headEnd type="none" w="med" len="med"/>
+                      <a:tailEnd type="none" w="med" len="med"/>
+                    </a:lnR>
+                    <a:lnT w="9525" cap="flat" cmpd="sng" algn="ctr">
+                      <a:solidFill>
+                        <a:srgbClr val="000000"/>
+                      </a:solidFill>
+                      <a:prstDash val="solid"/>
+                      <a:round/>
+                      <a:headEnd type="none" w="med" len="med"/>
+                      <a:tailEnd type="none" w="med" len="med"/>
+                    </a:lnT>
+                    <a:lnB w="9525" cap="flat" cmpd="sng" algn="ctr">
+                      <a:solidFill>
+                        <a:srgbClr val="000000"/>
+                      </a:solidFill>
+                      <a:prstDash val="solid"/>
+                      <a:round/>
+                      <a:headEnd type="none" w="med" len="med"/>
+                      <a:tailEnd type="none" w="med" len="med"/>
+                    </a:lnB>
+                    <a:noFill/>
+                  </a:tcPr>
+                </a:tc>
+                <a:tc>
+                  <a:txBody>
+                    <a:bodyPr/>
+                    <a:lstStyle/>
+                    <a:p>
+                      <a:pPr>
+                        <a:buNone/>
+                      </a:pPr>
+                      <a:r>
+                        <a:rPr lang="en-CA" sz="1600">
+                          <a:solidFill>
+                            <a:srgbClr val="000000"/>
+                          </a:solidFill>
+                          <a:effectLst/>
+                          <a:latin typeface="Helvetica Neue" panose="02000503000000020004" pitchFamily="2" charset="0"/>
+                        </a:rPr>
+                        <a:t>0.0611</a:t>
+                      </a:r>
+                      <a:endParaRPr lang="en-CA" sz="1600">
+                        <a:effectLst/>
+                      </a:endParaRPr>
+                    </a:p>
+                  </a:txBody>
+                  <a:tcPr marL="38100" marR="38100" marT="38100" marB="38100">
+                    <a:lnL w="9525" cap="flat" cmpd="sng" algn="ctr">
+                      <a:solidFill>
+                        <a:srgbClr val="000000"/>
+                      </a:solidFill>
+                      <a:prstDash val="solid"/>
+                      <a:round/>
+                      <a:headEnd type="none" w="med" len="med"/>
+                      <a:tailEnd type="none" w="med" len="med"/>
+                    </a:lnL>
+                    <a:lnR w="9525" cap="flat" cmpd="sng" algn="ctr">
+                      <a:solidFill>
+                        <a:srgbClr val="000000"/>
+                      </a:solidFill>
+                      <a:prstDash val="solid"/>
+                      <a:round/>
+                      <a:headEnd type="none" w="med" len="med"/>
+                      <a:tailEnd type="none" w="med" len="med"/>
+                    </a:lnR>
+                    <a:lnT w="9525" cap="flat" cmpd="sng" algn="ctr">
+                      <a:solidFill>
+                        <a:srgbClr val="000000"/>
+                      </a:solidFill>
+                      <a:prstDash val="solid"/>
+                      <a:round/>
+                      <a:headEnd type="none" w="med" len="med"/>
+                      <a:tailEnd type="none" w="med" len="med"/>
+                    </a:lnT>
+                    <a:lnB w="9525" cap="flat" cmpd="sng" algn="ctr">
+                      <a:solidFill>
+                        <a:srgbClr val="000000"/>
+                      </a:solidFill>
+                      <a:prstDash val="solid"/>
+                      <a:round/>
+                      <a:headEnd type="none" w="med" len="med"/>
+                      <a:tailEnd type="none" w="med" len="med"/>
+                    </a:lnB>
+                    <a:noFill/>
+                  </a:tcPr>
+                </a:tc>
+                <a:tc>
+                  <a:txBody>
+                    <a:bodyPr/>
+                    <a:lstStyle/>
+                    <a:p>
+                      <a:pPr>
+                        <a:buNone/>
+                      </a:pPr>
+                      <a:r>
+                        <a:rPr lang="en-CA" sz="1600" dirty="0">
+                          <a:solidFill>
+                            <a:srgbClr val="000000"/>
+                          </a:solidFill>
+                          <a:effectLst/>
+                          <a:latin typeface="Helvetica Neue" panose="02000503000000020004" pitchFamily="2" charset="0"/>
+                        </a:rPr>
+                        <a:t>0.0503</a:t>
+                      </a:r>
+                      <a:endParaRPr lang="en-CA" sz="1600" dirty="0">
+                        <a:effectLst/>
+                      </a:endParaRPr>
+                    </a:p>
+                  </a:txBody>
+                  <a:tcPr marL="38100" marR="38100" marT="38100" marB="38100">
+                    <a:lnL w="9525" cap="flat" cmpd="sng" algn="ctr">
+                      <a:solidFill>
+                        <a:srgbClr val="000000"/>
+                      </a:solidFill>
+                      <a:prstDash val="solid"/>
+                      <a:round/>
+                      <a:headEnd type="none" w="med" len="med"/>
+                      <a:tailEnd type="none" w="med" len="med"/>
+                    </a:lnL>
+                    <a:lnR w="9525" cap="flat" cmpd="sng" algn="ctr">
+                      <a:solidFill>
+                        <a:srgbClr val="000000"/>
+                      </a:solidFill>
+                      <a:prstDash val="solid"/>
+                      <a:round/>
+                      <a:headEnd type="none" w="med" len="med"/>
+                      <a:tailEnd type="none" w="med" len="med"/>
+                    </a:lnR>
+                    <a:lnT w="9525" cap="flat" cmpd="sng" algn="ctr">
+                      <a:solidFill>
+                        <a:srgbClr val="000000"/>
+                      </a:solidFill>
+                      <a:prstDash val="solid"/>
+                      <a:round/>
+                      <a:headEnd type="none" w="med" len="med"/>
+                      <a:tailEnd type="none" w="med" len="med"/>
+                    </a:lnT>
+                    <a:lnB w="9525" cap="flat" cmpd="sng" algn="ctr">
+                      <a:solidFill>
+                        <a:srgbClr val="000000"/>
+                      </a:solidFill>
+                      <a:prstDash val="solid"/>
+                      <a:round/>
+                      <a:headEnd type="none" w="med" len="med"/>
+                      <a:tailEnd type="none" w="med" len="med"/>
+                    </a:lnB>
+                    <a:noFill/>
+                  </a:tcPr>
+                </a:tc>
+                <a:extLst>
+                  <a:ext uri="{0D108BD9-81ED-4DB2-BD59-A6C34878D82A}">
+                    <a16:rowId xmlns:a16="http://schemas.microsoft.com/office/drawing/2014/main" val="2662761794"/>
+                  </a:ext>
+                </a:extLst>
+              </a:tr>
+            </a:tbl>
+          </a:graphicData>
+        </a:graphic>
+      </p:graphicFrame>
+      <p:pic>
+        <p:nvPicPr>
+          <p:cNvPr id="8" name="Picture 7" descr="A screenshot of a computer program&#10;&#10;AI-generated content may be incorrect.">
+            <a:extLst>
+              <a:ext uri="{FF2B5EF4-FFF2-40B4-BE49-F238E27FC236}">
+                <a16:creationId xmlns:a16="http://schemas.microsoft.com/office/drawing/2014/main" id="{FB338595-137F-22C5-DC8F-DBD989D326B9}"/>
+              </a:ext>
+            </a:extLst>
+          </p:cNvPr>
+          <p:cNvPicPr>
+            <a:picLocks noChangeAspect="1"/>
+          </p:cNvPicPr>
+          <p:nvPr/>
+        </p:nvPicPr>
+        <p:blipFill>
+          <a:blip r:embed="rId2"/>
+          <a:stretch>
+            <a:fillRect/>
+          </a:stretch>
+        </p:blipFill>
+        <p:spPr>
+          <a:xfrm>
+            <a:off x="1547845" y="3118498"/>
+            <a:ext cx="7416800" cy="1778000"/>
+          </a:xfrm>
+          <a:prstGeom prst="rect">
+            <a:avLst/>
+          </a:prstGeom>
+        </p:spPr>
+      </p:pic>
+    </p:spTree>
+    <p:extLst>
+      <p:ext uri="{BB962C8B-B14F-4D97-AF65-F5344CB8AC3E}">
+        <p14:creationId xmlns:p14="http://schemas.microsoft.com/office/powerpoint/2010/main" val="4121557936"/>
+      </p:ext>
+    </p:extLst>
+  </p:cSld>
+  <p:clrMapOvr>
+    <a:masterClrMapping/>
+  </p:clrMapOvr>
+</p:sld>
+</file>
+
+<file path=ppt/slides/slide9.xml><?xml version="1.0" encoding="utf-8"?>
 <p:sld xmlns:a="http://schemas.openxmlformats.org/drawingml/2006/main" xmlns:r="http://schemas.openxmlformats.org/officeDocument/2006/relationships" xmlns:p="http://schemas.openxmlformats.org/presentationml/2006/main">
   <p:cSld>
     <p:spTree>
